--- a/docs/sales/tm-partnership-pitch.pptx
+++ b/docs/sales/tm-partnership-pitch.pptx
@@ -2154,7 +2154,7 @@
                 <a:ea typeface="Malgun Gothic" pitchFamily="34" charset="-122"/>
                 <a:cs typeface="Malgun Gothic" pitchFamily="34" charset="-120"/>
               </a:rPr>
-              <a:t>CONFIDENTIAL · PARTNERSHIP</a:t>
+              <a:t>CONFIDENTIAL · PARTNERSHIP · v2</a:t>
             </a:r>
             <a:endParaRPr lang="en-US" sz="900" dirty="0"/>
           </a:p>
@@ -2168,7 +2168,7 @@
         </p:nvSpPr>
         <p:spPr>
           <a:xfrm>
-            <a:off x="0" y="1463040"/>
+            <a:off x="0" y="1280160"/>
             <a:ext cx="12191695" cy="2011680"/>
           </a:xfrm>
           <a:prstGeom prst="rect">
@@ -2221,7 +2221,7 @@
         </p:nvSpPr>
         <p:spPr>
           <a:xfrm>
-            <a:off x="0" y="3566160"/>
+            <a:off x="0" y="3383280"/>
             <a:ext cx="12191695" cy="365760"/>
           </a:xfrm>
           <a:prstGeom prst="rect">
@@ -2260,7 +2260,7 @@
         </p:nvSpPr>
         <p:spPr>
           <a:xfrm>
-            <a:off x="0" y="4114800"/>
+            <a:off x="0" y="3931920"/>
             <a:ext cx="12191695" cy="548640"/>
           </a:xfrm>
           <a:prstGeom prst="rect">
@@ -2299,7 +2299,7 @@
         </p:nvSpPr>
         <p:spPr>
           <a:xfrm>
-            <a:off x="5547208" y="4937760"/>
+            <a:off x="5547208" y="4754880"/>
             <a:ext cx="1097280" cy="36576"/>
           </a:xfrm>
           <a:prstGeom prst="rect">
@@ -2319,7 +2319,7 @@
         </p:nvSpPr>
         <p:spPr>
           <a:xfrm>
-            <a:off x="0" y="5074920"/>
+            <a:off x="0" y="4892040"/>
             <a:ext cx="12191695" cy="411480"/>
           </a:xfrm>
           <a:prstGeom prst="rect">
@@ -2344,7 +2344,7 @@
                 <a:ea typeface="Noto Serif KR" pitchFamily="34" charset="-122"/>
                 <a:cs typeface="Noto Serif KR" pitchFamily="34" charset="-120"/>
               </a:rPr>
-              <a:t>TM 파트너십 제안서</a:t>
+              <a:t>TM 파트너십 제안서  ·  v2</a:t>
             </a:r>
             <a:endParaRPr lang="en-US" sz="2000" dirty="0"/>
           </a:p>
@@ -2358,7 +2358,7 @@
         </p:nvSpPr>
         <p:spPr>
           <a:xfrm>
-            <a:off x="0" y="5532120"/>
+            <a:off x="0" y="5349240"/>
             <a:ext cx="12191695" cy="320040"/>
           </a:xfrm>
           <a:prstGeom prst="rect">
@@ -2375,17 +2375,17 @@
               <a:buNone/>
             </a:pPr>
             <a:r>
-              <a:rPr lang="en-US" sz="1200" spc="400" kern="0" dirty="0">
-                <a:solidFill>
-                  <a:srgbClr val="B7B8C0"/>
-                </a:solidFill>
-                <a:latin typeface="Malgun Gothic" pitchFamily="34" charset="0"/>
-                <a:ea typeface="Malgun Gothic" pitchFamily="34" charset="-122"/>
-                <a:cs typeface="Malgun Gothic" pitchFamily="34" charset="-120"/>
-              </a:rPr>
-              <a:t>Annual Package · 39 / 89 / 180만 원  ·  TM 채널 위탁 판매</a:t>
-            </a:r>
-            <a:endParaRPr lang="en-US" sz="1200" dirty="0"/>
+              <a:rPr lang="en-US" sz="1300" spc="400" kern="0" dirty="0">
+                <a:solidFill>
+                  <a:srgbClr val="C9A961"/>
+                </a:solidFill>
+                <a:latin typeface="Malgun Gothic" pitchFamily="34" charset="0"/>
+                <a:ea typeface="Malgun Gothic" pitchFamily="34" charset="-122"/>
+                <a:cs typeface="Malgun Gothic" pitchFamily="34" charset="-120"/>
+              </a:rPr>
+              <a:t>Premium 39만 / Family 59만  ·  수수료 35~40%  ·  SKU 채널 분리</a:t>
+            </a:r>
+            <a:endParaRPr lang="en-US" sz="1300" dirty="0"/>
           </a:p>
         </p:txBody>
       </p:sp>
@@ -2422,7 +2422,7 @@
                 <a:ea typeface="Malgun Gothic" pitchFamily="34" charset="-122"/>
                 <a:cs typeface="Malgun Gothic" pitchFamily="34" charset="-120"/>
               </a:rPr>
-              <a:t>자평 운영팀  ·  2026.06  ·  v1</a:t>
+              <a:t>자평 운영팀  ·  2026.06  ·  BM v2  ·  3중 적대적 검증 통합</a:t>
             </a:r>
             <a:endParaRPr lang="en-US" sz="1000" dirty="0"/>
           </a:p>
@@ -2524,7 +2524,7 @@
               <a:buNone/>
             </a:pPr>
             <a:r>
-              <a:rPr lang="en-US" sz="2800" b="1" dirty="0">
+              <a:rPr lang="en-US" sz="2600" b="1" dirty="0">
                 <a:solidFill>
                   <a:srgbClr val="ECECEF"/>
                 </a:solidFill>
@@ -2534,7 +2534,7 @@
               </a:rPr>
               <a:t>책임 분리 — TM은 콜에만 집중</a:t>
             </a:r>
-            <a:endParaRPr lang="en-US" sz="2800" dirty="0"/>
+            <a:endParaRPr lang="en-US" sz="2600" dirty="0"/>
           </a:p>
         </p:txBody>
       </p:sp>
@@ -2591,7 +2591,7 @@
                 <a:ea typeface="Malgun Gothic" pitchFamily="34" charset="-122"/>
                 <a:cs typeface="Malgun Gothic" pitchFamily="34" charset="-120"/>
               </a:rPr>
-              <a:t>CONFIDENTIAL · PARTNERSHIP</a:t>
+              <a:t>CONFIDENTIAL · PARTNERSHIP · v2</a:t>
             </a:r>
             <a:endParaRPr lang="en-US" sz="900" dirty="0"/>
           </a:p>
@@ -2774,13 +2774,13 @@
           <a:p>
             <a:pPr marL="342900" indent="-342900">
               <a:spcAft>
-                <a:spcPts val="600"/>
+                <a:spcPts val="400"/>
               </a:spcAft>
               <a:buSzPct val="100000"/>
               <a:buChar char="■"/>
             </a:pPr>
             <a:r>
-              <a:rPr lang="en-US" sz="1300" dirty="0">
+              <a:rPr lang="en-US" sz="1200" dirty="0">
                 <a:solidFill>
                   <a:srgbClr val="ECECEF"/>
                 </a:solidFill>
@@ -2790,18 +2790,18 @@
               </a:rPr>
               <a:t>제품 (앱 · 자문위원 · 서버)</a:t>
             </a:r>
-            <a:endParaRPr lang="en-US" sz="1300" dirty="0"/>
+            <a:endParaRPr lang="en-US" sz="1200" dirty="0"/>
           </a:p>
           <a:p>
             <a:pPr marL="342900" indent="-342900">
               <a:spcAft>
-                <a:spcPts val="600"/>
+                <a:spcPts val="400"/>
               </a:spcAft>
               <a:buSzPct val="100000"/>
               <a:buChar char="■"/>
             </a:pPr>
             <a:r>
-              <a:rPr lang="en-US" sz="1300" dirty="0">
+              <a:rPr lang="en-US" sz="1200" dirty="0">
                 <a:solidFill>
                   <a:srgbClr val="ECECEF"/>
                 </a:solidFill>
@@ -2809,20 +2809,20 @@
                 <a:ea typeface="Malgun Gothic" pitchFamily="34" charset="-122"/>
                 <a:cs typeface="Malgun Gothic" pitchFamily="34" charset="-120"/>
               </a:rPr>
-              <a:t>결제 시스템 (PortOne · KG)</a:t>
-            </a:r>
-            <a:endParaRPr lang="en-US" sz="1300" dirty="0"/>
+              <a:t>결제 시스템 (토스 · 카카오페이)</a:t>
+            </a:r>
+            <a:endParaRPr lang="en-US" sz="1200" dirty="0"/>
           </a:p>
           <a:p>
             <a:pPr marL="342900" indent="-342900">
               <a:spcAft>
-                <a:spcPts val="600"/>
+                <a:spcPts val="400"/>
               </a:spcAft>
               <a:buSzPct val="100000"/>
               <a:buChar char="■"/>
             </a:pPr>
             <a:r>
-              <a:rPr lang="en-US" sz="1300" dirty="0">
+              <a:rPr lang="en-US" sz="1200" dirty="0">
                 <a:solidFill>
                   <a:srgbClr val="ECECEF"/>
                 </a:solidFill>
@@ -2832,18 +2832,18 @@
               </a:rPr>
               <a:t>약관 · 환불 · CS</a:t>
             </a:r>
-            <a:endParaRPr lang="en-US" sz="1300" dirty="0"/>
+            <a:endParaRPr lang="en-US" sz="1200" dirty="0"/>
           </a:p>
           <a:p>
             <a:pPr marL="342900" indent="-342900">
               <a:spcAft>
-                <a:spcPts val="600"/>
+                <a:spcPts val="400"/>
               </a:spcAft>
               <a:buSzPct val="100000"/>
               <a:buChar char="■"/>
             </a:pPr>
             <a:r>
-              <a:rPr lang="en-US" sz="1300" dirty="0">
+              <a:rPr lang="en-US" sz="1200" dirty="0">
                 <a:solidFill>
                   <a:srgbClr val="ECECEF"/>
                 </a:solidFill>
@@ -2853,18 +2853,18 @@
               </a:rPr>
               <a:t>법무 · 표시광고 사전 검수</a:t>
             </a:r>
-            <a:endParaRPr lang="en-US" sz="1300" dirty="0"/>
+            <a:endParaRPr lang="en-US" sz="1200" dirty="0"/>
           </a:p>
           <a:p>
             <a:pPr marL="342900" indent="-342900">
               <a:spcAft>
-                <a:spcPts val="600"/>
+                <a:spcPts val="400"/>
               </a:spcAft>
               <a:buSzPct val="100000"/>
               <a:buChar char="■"/>
             </a:pPr>
             <a:r>
-              <a:rPr lang="en-US" sz="1300" dirty="0">
+              <a:rPr lang="en-US" sz="1200" dirty="0">
                 <a:solidFill>
                   <a:srgbClr val="ECECEF"/>
                 </a:solidFill>
@@ -2872,20 +2872,20 @@
                 <a:ea typeface="Malgun Gothic" pitchFamily="34" charset="-122"/>
                 <a:cs typeface="Malgun Gothic" pitchFamily="34" charset="-120"/>
               </a:rPr>
-              <a:t>완성된 TM 스크립트 + 4+6시간 무상 교육</a:t>
-            </a:r>
-            <a:endParaRPr lang="en-US" sz="1300" dirty="0"/>
+              <a:t>금지어 CI 훅 (양사 카피 자동 검수)</a:t>
+            </a:r>
+            <a:endParaRPr lang="en-US" sz="1200" dirty="0"/>
           </a:p>
           <a:p>
             <a:pPr marL="342900" indent="-342900">
               <a:spcAft>
-                <a:spcPts val="600"/>
+                <a:spcPts val="400"/>
               </a:spcAft>
               <a:buSzPct val="100000"/>
               <a:buChar char="■"/>
             </a:pPr>
             <a:r>
-              <a:rPr lang="en-US" sz="1300" dirty="0">
+              <a:rPr lang="en-US" sz="1200" dirty="0">
                 <a:solidFill>
                   <a:srgbClr val="ECECEF"/>
                 </a:solidFill>
@@ -2893,20 +2893,20 @@
                 <a:ea typeface="Malgun Gothic" pitchFamily="34" charset="-122"/>
                 <a:cs typeface="Malgun Gothic" pitchFamily="34" charset="-120"/>
               </a:rPr>
-              <a:t>CRM 대시보드</a:t>
-            </a:r>
-            <a:endParaRPr lang="en-US" sz="1300" dirty="0"/>
+              <a:t>완성된 TM 스크립트 + 4+6시간 무상 교육</a:t>
+            </a:r>
+            <a:endParaRPr lang="en-US" sz="1200" dirty="0"/>
           </a:p>
           <a:p>
             <a:pPr marL="342900" indent="-342900">
               <a:spcAft>
-                <a:spcPts val="600"/>
+                <a:spcPts val="400"/>
               </a:spcAft>
               <a:buSzPct val="100000"/>
               <a:buChar char="■"/>
             </a:pPr>
             <a:r>
-              <a:rPr lang="en-US" sz="1300" dirty="0">
+              <a:rPr lang="en-US" sz="1200" dirty="0">
                 <a:solidFill>
                   <a:srgbClr val="ECECEF"/>
                 </a:solidFill>
@@ -2914,20 +2914,20 @@
                 <a:ea typeface="Malgun Gothic" pitchFamily="34" charset="-122"/>
                 <a:cs typeface="Malgun Gothic" pitchFamily="34" charset="-120"/>
               </a:rPr>
-              <a:t>마케팅 자료 · 리드</a:t>
-            </a:r>
-            <a:endParaRPr lang="en-US" sz="1300" dirty="0"/>
+              <a:t>CRM 대시보드 · 마케팅 자료</a:t>
+            </a:r>
+            <a:endParaRPr lang="en-US" sz="1200" dirty="0"/>
           </a:p>
           <a:p>
             <a:pPr marL="342900" indent="-342900">
               <a:spcAft>
-                <a:spcPts val="600"/>
+                <a:spcPts val="400"/>
               </a:spcAft>
               <a:buSzPct val="100000"/>
               <a:buChar char="■"/>
             </a:pPr>
             <a:r>
-              <a:rPr lang="en-US" sz="1300" dirty="0">
+              <a:rPr lang="en-US" sz="1200" dirty="0">
                 <a:solidFill>
                   <a:srgbClr val="ECECEF"/>
                 </a:solidFill>
@@ -2935,9 +2935,9 @@
                 <a:ea typeface="Malgun Gothic" pitchFamily="34" charset="-122"/>
                 <a:cs typeface="Malgun Gothic" pitchFamily="34" charset="-120"/>
               </a:rPr>
-              <a:t>기술 지원 (영업일 4시간 내)</a:t>
-            </a:r>
-            <a:endParaRPr lang="en-US" sz="1300" dirty="0"/>
+              <a:t>자녀 사주 출시 보류 (윤리)</a:t>
+            </a:r>
+            <a:endParaRPr lang="en-US" sz="1200" dirty="0"/>
           </a:p>
         </p:txBody>
       </p:sp>
@@ -3149,7 +3149,7 @@
                 <a:ea typeface="Malgun Gothic" pitchFamily="34" charset="-122"/>
                 <a:cs typeface="Malgun Gothic" pitchFamily="34" charset="-120"/>
               </a:rPr>
-              <a:t>주 1회 KPI 보고</a:t>
+              <a:t>주 1회 KPI 보고 (티어 믹스 포함)</a:t>
             </a:r>
             <a:endParaRPr lang="en-US" sz="1300" dirty="0"/>
           </a:p>
@@ -3213,7 +3213,7 @@
                 <a:ea typeface="Noto Serif KR" pitchFamily="34" charset="-122"/>
                 <a:cs typeface="Noto Serif KR" pitchFamily="34" charset="-120"/>
               </a:rPr>
-              <a:t>법적 책임·환불 회수·민원은 자평이 100% 떠안는 구조  ·  TM은 콜만</a:t>
+              <a:t>법적 책임·환불 회수·민원·자녀 윤리는 자평이 100% 떠안는 구조  ·  TM은 콜만</a:t>
             </a:r>
             <a:endParaRPr lang="en-US" sz="1200" dirty="0"/>
           </a:p>
@@ -3315,7 +3315,7 @@
               <a:buNone/>
             </a:pPr>
             <a:r>
-              <a:rPr lang="en-US" sz="2800" b="1" dirty="0">
+              <a:rPr lang="en-US" sz="2600" b="1" dirty="0">
                 <a:solidFill>
                   <a:srgbClr val="ECECEF"/>
                 </a:solidFill>
@@ -3325,7 +3325,7 @@
               </a:rPr>
               <a:t>월 100건 가입 시 — TM 대행사 수익 시뮬레이션</a:t>
             </a:r>
-            <a:endParaRPr lang="en-US" sz="2800" dirty="0"/>
+            <a:endParaRPr lang="en-US" sz="2600" dirty="0"/>
           </a:p>
         </p:txBody>
       </p:sp>
@@ -3382,7 +3382,7 @@
                 <a:ea typeface="Malgun Gothic" pitchFamily="34" charset="-122"/>
                 <a:cs typeface="Malgun Gothic" pitchFamily="34" charset="-120"/>
               </a:rPr>
-              <a:t>CONFIDENTIAL · PARTNERSHIP</a:t>
+              <a:t>CONFIDENTIAL · PARTNERSHIP · v2</a:t>
             </a:r>
             <a:endParaRPr lang="en-US" sz="900" dirty="0"/>
           </a:p>
@@ -3513,7 +3513,7 @@
                 <a:ea typeface="Noto Serif KR" pitchFamily="34" charset="-122"/>
                 <a:cs typeface="Noto Serif KR" pitchFamily="34" charset="-120"/>
               </a:rPr>
-              <a:t>가입 1건 기준  ·  프리미엄 (수수료 25%)</a:t>
+              <a:t>가입 1건  ·  Premium (수수료 35%)</a:t>
             </a:r>
             <a:endParaRPr lang="en-US" sz="1200" dirty="0"/>
           </a:p>
@@ -3552,7 +3552,7 @@
                 <a:ea typeface="Malgun Gothic" pitchFamily="34" charset="-122"/>
                 <a:cs typeface="Malgun Gothic" pitchFamily="34" charset="-120"/>
               </a:rPr>
-              <a:t>TM 수수료 (890k × 25%)</a:t>
+              <a:t>TM 수수료 (390k × 35%)</a:t>
             </a:r>
             <a:endParaRPr lang="en-US" sz="1200" dirty="0"/>
           </a:p>
@@ -3591,7 +3591,7 @@
                 <a:ea typeface="Noto Serif KR" pitchFamily="34" charset="-122"/>
                 <a:cs typeface="Noto Serif KR" pitchFamily="34" charset="-120"/>
               </a:rPr>
-              <a:t>+ 222,500</a:t>
+              <a:t>+ 136,500</a:t>
             </a:r>
             <a:endParaRPr lang="en-US" sz="1500" dirty="0"/>
           </a:p>
@@ -3764,7 +3764,7 @@
                 <a:ea typeface="Noto Serif KR" pitchFamily="34" charset="-122"/>
                 <a:cs typeface="Noto Serif KR" pitchFamily="34" charset="-120"/>
               </a:rPr>
-              <a:t>- 33,375</a:t>
+              <a:t>- 20,475</a:t>
             </a:r>
             <a:endParaRPr lang="en-US" sz="1500" dirty="0"/>
           </a:p>
@@ -3865,7 +3865,7 @@
                 <a:ea typeface="Noto Serif KR" pitchFamily="34" charset="-122"/>
                 <a:cs typeface="Noto Serif KR" pitchFamily="34" charset="-120"/>
               </a:rPr>
-              <a:t>+ 89,125원</a:t>
+              <a:t>+ 16,025원</a:t>
             </a:r>
             <a:endParaRPr lang="en-US" sz="2200" dirty="0"/>
           </a:p>
@@ -3929,7 +3929,7 @@
                 <a:ea typeface="Noto Serif KR" pitchFamily="34" charset="-122"/>
                 <a:cs typeface="Noto Serif KR" pitchFamily="34" charset="-120"/>
               </a:rPr>
-              <a:t>월 100건 가입 시 (티어 믹스)</a:t>
+              <a:t>월 100건 가입  ·  Premium 70 + Family 30 믹스</a:t>
             </a:r>
             <a:endParaRPr lang="en-US" sz="1200" dirty="0"/>
           </a:p>
@@ -3943,8 +3943,8 @@
         </p:nvSpPr>
         <p:spPr>
           <a:xfrm>
-            <a:off x="6263640" y="2423160"/>
-            <a:ext cx="2743200" cy="365760"/>
+            <a:off x="6263640" y="2468880"/>
+            <a:ext cx="2743200" cy="457200"/>
           </a:xfrm>
           <a:prstGeom prst="rect">
             <a:avLst/>
@@ -3968,7 +3968,7 @@
                 <a:ea typeface="Malgun Gothic" pitchFamily="34" charset="-122"/>
                 <a:cs typeface="Malgun Gothic" pitchFamily="34" charset="-120"/>
               </a:rPr>
-              <a:t>표준 50건 (×20%)</a:t>
+              <a:t>Premium 70건 (×35%)</a:t>
             </a:r>
             <a:endParaRPr lang="en-US" sz="1200" dirty="0"/>
           </a:p>
@@ -3982,8 +3982,8 @@
         </p:nvSpPr>
         <p:spPr>
           <a:xfrm>
-            <a:off x="9006840" y="2423160"/>
-            <a:ext cx="2468880" cy="365760"/>
+            <a:off x="9006840" y="2468880"/>
+            <a:ext cx="2468880" cy="457200"/>
           </a:xfrm>
           <a:prstGeom prst="rect">
             <a:avLst/>
@@ -4007,7 +4007,7 @@
                 <a:ea typeface="Noto Serif KR" pitchFamily="34" charset="-122"/>
                 <a:cs typeface="Noto Serif KR" pitchFamily="34" charset="-120"/>
               </a:rPr>
-              <a:t>+ 3,900,000</a:t>
+              <a:t>+ 9,555,000</a:t>
             </a:r>
             <a:endParaRPr lang="en-US" sz="1400" dirty="0"/>
           </a:p>
@@ -4021,8 +4021,8 @@
         </p:nvSpPr>
         <p:spPr>
           <a:xfrm>
-            <a:off x="6263640" y="2880360"/>
-            <a:ext cx="2743200" cy="365760"/>
+            <a:off x="6263640" y="3017520"/>
+            <a:ext cx="2743200" cy="457200"/>
           </a:xfrm>
           <a:prstGeom prst="rect">
             <a:avLst/>
@@ -4046,7 +4046,7 @@
                 <a:ea typeface="Malgun Gothic" pitchFamily="34" charset="-122"/>
                 <a:cs typeface="Malgun Gothic" pitchFamily="34" charset="-120"/>
               </a:rPr>
-              <a:t>프리미엄 40건 (×25%)</a:t>
+              <a:t>Family 30건 (×40%)</a:t>
             </a:r>
             <a:endParaRPr lang="en-US" sz="1200" dirty="0"/>
           </a:p>
@@ -4060,8 +4060,8 @@
         </p:nvSpPr>
         <p:spPr>
           <a:xfrm>
-            <a:off x="9006840" y="2880360"/>
-            <a:ext cx="2468880" cy="365760"/>
+            <a:off x="9006840" y="3017520"/>
+            <a:ext cx="2468880" cy="457200"/>
           </a:xfrm>
           <a:prstGeom prst="rect">
             <a:avLst/>
@@ -4085,7 +4085,7 @@
                 <a:ea typeface="Noto Serif KR" pitchFamily="34" charset="-122"/>
                 <a:cs typeface="Noto Serif KR" pitchFamily="34" charset="-120"/>
               </a:rPr>
-              <a:t>+ 8,900,000</a:t>
+              <a:t>+ 7,080,000</a:t>
             </a:r>
             <a:endParaRPr lang="en-US" sz="1400" dirty="0"/>
           </a:p>
@@ -4099,8 +4099,8 @@
         </p:nvSpPr>
         <p:spPr>
           <a:xfrm>
-            <a:off x="6263640" y="3337560"/>
-            <a:ext cx="2743200" cy="365760"/>
+            <a:off x="6263640" y="3566160"/>
+            <a:ext cx="2743200" cy="457200"/>
           </a:xfrm>
           <a:prstGeom prst="rect">
             <a:avLst/>
@@ -4118,13 +4118,13 @@
             <a:r>
               <a:rPr lang="en-US" sz="1200" dirty="0">
                 <a:solidFill>
-                  <a:srgbClr val="ECECEF"/>
-                </a:solidFill>
-                <a:latin typeface="Malgun Gothic" pitchFamily="34" charset="0"/>
-                <a:ea typeface="Malgun Gothic" pitchFamily="34" charset="-122"/>
-                <a:cs typeface="Malgun Gothic" pitchFamily="34" charset="-120"/>
-              </a:rPr>
-              <a:t>VIP 10건 (×30%)</a:t>
+                  <a:srgbClr val="B7B8C0"/>
+                </a:solidFill>
+                <a:latin typeface="Malgun Gothic" pitchFamily="34" charset="0"/>
+                <a:ea typeface="Malgun Gothic" pitchFamily="34" charset="-122"/>
+                <a:cs typeface="Malgun Gothic" pitchFamily="34" charset="-120"/>
+              </a:rPr>
+              <a:t>콜센터 운영비 (100 × 100k)</a:t>
             </a:r>
             <a:endParaRPr lang="en-US" sz="1200" dirty="0"/>
           </a:p>
@@ -4138,8 +4138,8 @@
         </p:nvSpPr>
         <p:spPr>
           <a:xfrm>
-            <a:off x="9006840" y="3337560"/>
-            <a:ext cx="2468880" cy="365760"/>
+            <a:off x="9006840" y="3566160"/>
+            <a:ext cx="2468880" cy="457200"/>
           </a:xfrm>
           <a:prstGeom prst="rect">
             <a:avLst/>
@@ -4157,13 +4157,13 @@
             <a:r>
               <a:rPr lang="en-US" sz="1400" b="1" dirty="0">
                 <a:solidFill>
-                  <a:srgbClr val="ECECEF"/>
+                  <a:srgbClr val="B7B8C0"/>
                 </a:solidFill>
                 <a:latin typeface="Noto Serif KR" pitchFamily="34" charset="0"/>
                 <a:ea typeface="Noto Serif KR" pitchFamily="34" charset="-122"/>
                 <a:cs typeface="Noto Serif KR" pitchFamily="34" charset="-120"/>
               </a:rPr>
-              <a:t>+ 5,400,000</a:t>
+              <a:t>- 10,000,000</a:t>
             </a:r>
             <a:endParaRPr lang="en-US" sz="1400" dirty="0"/>
           </a:p>
@@ -4177,8 +4177,8 @@
         </p:nvSpPr>
         <p:spPr>
           <a:xfrm>
-            <a:off x="6263640" y="3794760"/>
-            <a:ext cx="2743200" cy="365760"/>
+            <a:off x="6263640" y="4114800"/>
+            <a:ext cx="2743200" cy="457200"/>
           </a:xfrm>
           <a:prstGeom prst="rect">
             <a:avLst/>
@@ -4202,7 +4202,7 @@
                 <a:ea typeface="Malgun Gothic" pitchFamily="34" charset="-122"/>
                 <a:cs typeface="Malgun Gothic" pitchFamily="34" charset="-120"/>
               </a:rPr>
-              <a:t>콜센터 운영비</a:t>
+              <a:t>청약철회 (15%)</a:t>
             </a:r>
             <a:endParaRPr lang="en-US" sz="1200" dirty="0"/>
           </a:p>
@@ -4216,8 +4216,8 @@
         </p:nvSpPr>
         <p:spPr>
           <a:xfrm>
-            <a:off x="9006840" y="3794760"/>
-            <a:ext cx="2468880" cy="365760"/>
+            <a:off x="9006840" y="4114800"/>
+            <a:ext cx="2468880" cy="457200"/>
           </a:xfrm>
           <a:prstGeom prst="rect">
             <a:avLst/>
@@ -4241,7 +4241,7 @@
                 <a:ea typeface="Noto Serif KR" pitchFamily="34" charset="-122"/>
                 <a:cs typeface="Noto Serif KR" pitchFamily="34" charset="-120"/>
               </a:rPr>
-              <a:t>- 10,000,000</a:t>
+              <a:t>- 2,495,250</a:t>
             </a:r>
             <a:endParaRPr lang="en-US" sz="1400" dirty="0"/>
           </a:p>
@@ -4249,91 +4249,13 @@
       </p:sp>
       <p:sp>
         <p:nvSpPr>
-          <p:cNvPr id="28" name="Text 26"/>
-          <p:cNvSpPr/>
-          <p:nvPr/>
-        </p:nvSpPr>
-        <p:spPr>
-          <a:xfrm>
-            <a:off x="6263640" y="4251960"/>
-            <a:ext cx="2743200" cy="365760"/>
-          </a:xfrm>
-          <a:prstGeom prst="rect">
-            <a:avLst/>
-          </a:prstGeom>
-          <a:noFill/>
-          <a:ln/>
-        </p:spPr>
-        <p:txBody>
-          <a:bodyPr wrap="square" lIns="0" tIns="0" rIns="0" bIns="0" rtlCol="0" anchor="ctr"/>
-          <a:lstStyle/>
-          <a:p>
-            <a:pPr indent="0" marL="0">
-              <a:buNone/>
-            </a:pPr>
-            <a:r>
-              <a:rPr lang="en-US" sz="1200" dirty="0">
-                <a:solidFill>
-                  <a:srgbClr val="B7B8C0"/>
-                </a:solidFill>
-                <a:latin typeface="Malgun Gothic" pitchFamily="34" charset="0"/>
-                <a:ea typeface="Malgun Gothic" pitchFamily="34" charset="-122"/>
-                <a:cs typeface="Malgun Gothic" pitchFamily="34" charset="-120"/>
-              </a:rPr>
-              <a:t>청약철회 (15%)</a:t>
-            </a:r>
-            <a:endParaRPr lang="en-US" sz="1200" dirty="0"/>
-          </a:p>
-        </p:txBody>
-      </p:sp>
-      <p:sp>
-        <p:nvSpPr>
-          <p:cNvPr id="29" name="Text 27"/>
-          <p:cNvSpPr/>
-          <p:nvPr/>
-        </p:nvSpPr>
-        <p:spPr>
-          <a:xfrm>
-            <a:off x="9006840" y="4251960"/>
-            <a:ext cx="2468880" cy="365760"/>
-          </a:xfrm>
-          <a:prstGeom prst="rect">
-            <a:avLst/>
-          </a:prstGeom>
-          <a:noFill/>
-          <a:ln/>
-        </p:spPr>
-        <p:txBody>
-          <a:bodyPr wrap="square" lIns="0" tIns="0" rIns="0" bIns="0" rtlCol="0" anchor="ctr"/>
-          <a:lstStyle/>
-          <a:p>
-            <a:pPr algn="r" indent="0" marL="0">
-              <a:buNone/>
-            </a:pPr>
-            <a:r>
-              <a:rPr lang="en-US" sz="1400" b="1" dirty="0">
-                <a:solidFill>
-                  <a:srgbClr val="B7B8C0"/>
-                </a:solidFill>
-                <a:latin typeface="Noto Serif KR" pitchFamily="34" charset="0"/>
-                <a:ea typeface="Noto Serif KR" pitchFamily="34" charset="-122"/>
-                <a:cs typeface="Noto Serif KR" pitchFamily="34" charset="-120"/>
-              </a:rPr>
-              <a:t>- 2,730,000</a:t>
-            </a:r>
-            <a:endParaRPr lang="en-US" sz="1400" dirty="0"/>
-          </a:p>
-        </p:txBody>
-      </p:sp>
-      <p:sp>
-        <p:nvSpPr>
-          <p:cNvPr id="30" name="Shape 28"/>
-          <p:cNvSpPr/>
-          <p:nvPr/>
-        </p:nvSpPr>
-        <p:spPr>
-          <a:xfrm>
-            <a:off x="6263640" y="4983480"/>
+          <p:cNvPr id="28" name="Shape 26"/>
+          <p:cNvSpPr/>
+          <p:nvPr/>
+        </p:nvSpPr>
+        <p:spPr>
+          <a:xfrm>
+            <a:off x="6263640" y="5029200"/>
             <a:ext cx="5212080" cy="0"/>
           </a:xfrm>
           <a:prstGeom prst="line">
@@ -4350,13 +4272,13 @@
       </p:sp>
       <p:sp>
         <p:nvSpPr>
-          <p:cNvPr id="31" name="Text 29"/>
-          <p:cNvSpPr/>
-          <p:nvPr/>
-        </p:nvSpPr>
-        <p:spPr>
-          <a:xfrm>
-            <a:off x="6263640" y="5074920"/>
+          <p:cNvPr id="29" name="Text 27"/>
+          <p:cNvSpPr/>
+          <p:nvPr/>
+        </p:nvSpPr>
+        <p:spPr>
+          <a:xfrm>
+            <a:off x="6263640" y="5120640"/>
             <a:ext cx="2743200" cy="640080"/>
           </a:xfrm>
           <a:prstGeom prst="rect">
@@ -4389,13 +4311,13 @@
       </p:sp>
       <p:sp>
         <p:nvSpPr>
-          <p:cNvPr id="32" name="Text 30"/>
-          <p:cNvSpPr/>
-          <p:nvPr/>
-        </p:nvSpPr>
-        <p:spPr>
-          <a:xfrm>
-            <a:off x="8686800" y="5074920"/>
+          <p:cNvPr id="30" name="Text 28"/>
+          <p:cNvSpPr/>
+          <p:nvPr/>
+        </p:nvSpPr>
+        <p:spPr>
+          <a:xfrm>
+            <a:off x="8686800" y="5120640"/>
             <a:ext cx="2788920" cy="640080"/>
           </a:xfrm>
           <a:prstGeom prst="rect">
@@ -4420,7 +4342,7 @@
                 <a:ea typeface="Noto Serif KR" pitchFamily="34" charset="-122"/>
                 <a:cs typeface="Noto Serif KR" pitchFamily="34" charset="-120"/>
               </a:rPr>
-              <a:t>+ 5,470,000원</a:t>
+              <a:t>+ 4,139,750원</a:t>
             </a:r>
             <a:endParaRPr lang="en-US" sz="2400" dirty="0"/>
           </a:p>
@@ -4428,13 +4350,13 @@
       </p:sp>
       <p:sp>
         <p:nvSpPr>
-          <p:cNvPr id="33" name="Text 31"/>
-          <p:cNvSpPr/>
-          <p:nvPr/>
-        </p:nvSpPr>
-        <p:spPr>
-          <a:xfrm>
-            <a:off x="5989320" y="5852160"/>
+          <p:cNvPr id="31" name="Text 29"/>
+          <p:cNvSpPr/>
+          <p:nvPr/>
+        </p:nvSpPr>
+        <p:spPr>
+          <a:xfrm>
+            <a:off x="5989320" y="5897880"/>
             <a:ext cx="5669280" cy="274320"/>
           </a:xfrm>
           <a:prstGeom prst="rect">
@@ -4459,7 +4381,7 @@
                 <a:ea typeface="Malgun Gothic" pitchFamily="34" charset="-122"/>
                 <a:cs typeface="Malgun Gothic" pitchFamily="34" charset="-120"/>
               </a:rPr>
-              <a:t>상담사 5명 파일럿 → 본 운영(20명) 시 월 2천만 원대 가능</a:t>
+              <a:t>상담사 5명 → 본 운영(20명) 시 월 1.5천만 원대 가능</a:t>
             </a:r>
             <a:endParaRPr lang="en-US" sz="1000" dirty="0"/>
           </a:p>
@@ -4561,7 +4483,7 @@
               <a:buNone/>
             </a:pPr>
             <a:r>
-              <a:rPr lang="en-US" sz="2800" b="1" dirty="0">
+              <a:rPr lang="en-US" sz="2600" b="1" dirty="0">
                 <a:solidFill>
                   <a:srgbClr val="ECECEF"/>
                 </a:solidFill>
@@ -4569,9 +4491,9 @@
                 <a:ea typeface="Noto Serif KR" pitchFamily="34" charset="-122"/>
                 <a:cs typeface="Noto Serif KR" pitchFamily="34" charset="-120"/>
               </a:rPr>
-              <a:t>TM 대표가 가장 걱정할 7개 리스크 — 자평이 헷지</a:t>
-            </a:r>
-            <a:endParaRPr lang="en-US" sz="2800" dirty="0"/>
+              <a:t>TM 대표가 가장 걱정할 8개 리스크 — 자평이 헷지</a:t>
+            </a:r>
+            <a:endParaRPr lang="en-US" sz="2600" dirty="0"/>
           </a:p>
         </p:txBody>
       </p:sp>
@@ -4628,7 +4550,7 @@
                 <a:ea typeface="Malgun Gothic" pitchFamily="34" charset="-122"/>
                 <a:cs typeface="Malgun Gothic" pitchFamily="34" charset="-120"/>
               </a:rPr>
-              <a:t>CONFIDENTIAL · PARTNERSHIP</a:t>
+              <a:t>CONFIDENTIAL · PARTNERSHIP · v2</a:t>
             </a:r>
             <a:endParaRPr lang="en-US" sz="900" dirty="0"/>
           </a:p>
@@ -4727,7 +4649,7 @@
                 <a:gridCol w="4114800"/>
                 <a:gridCol w="6967728"/>
               </a:tblGrid>
-              <a:tr h="502920">
+              <a:tr h="438912">
                 <a:tc>
                   <a:txBody>
                     <a:bodyPr/>
@@ -4865,7 +4787,7 @@
                   </a:tcPr>
                 </a:tc>
               </a:tr>
-              <a:tr h="502920">
+              <a:tr h="438912">
                 <a:tc>
                   <a:txBody>
                     <a:bodyPr/>
@@ -4875,7 +4797,7 @@
                         <a:buNone/>
                       </a:pPr>
                       <a:r>
-                        <a:rPr lang="en-US" sz="1200" b="1" dirty="0">
+                        <a:rPr lang="en-US" sz="1150" b="1" dirty="0">
                           <a:solidFill>
                             <a:srgbClr val="ECECEF"/>
                           </a:solidFill>
@@ -4885,7 +4807,7 @@
                         </a:rPr>
                         <a:t>표시광고법 (부당 표시)</a:t>
                       </a:r>
-                      <a:endParaRPr lang="en-US" sz="1200" dirty="0">
+                      <a:endParaRPr lang="en-US" sz="1150" dirty="0">
                         <a:latin typeface="Noto Serif KR" charset="0"/>
                         <a:ea typeface="Noto Serif KR" charset="0"/>
                         <a:cs typeface="Noto Serif KR" charset="0"/>
@@ -4943,7 +4865,7 @@
                         <a:buNone/>
                       </a:pPr>
                       <a:r>
-                        <a:rPr lang="en-US" sz="1200" dirty="0">
+                        <a:rPr lang="en-US" sz="1150" dirty="0">
                           <a:solidFill>
                             <a:srgbClr val="B7B8C0"/>
                           </a:solidFill>
@@ -4951,9 +4873,9 @@
                           <a:ea typeface="Malgun Gothic" pitchFamily="34" charset="-122"/>
                           <a:cs typeface="Malgun Gothic" pitchFamily="34" charset="-120"/>
                         </a:rPr>
-                        <a:t>자평이 사전 검수한 멘트만 사용. 위반 시 자평이 1차 책임</a:t>
+                        <a:t>자평 사전 검수 멘트만 + 금지어 CI 훅. 위반 시 자평 1차 책임</a:t>
                       </a:r>
-                      <a:endParaRPr lang="en-US" sz="1200" dirty="0">
+                      <a:endParaRPr lang="en-US" sz="1150" dirty="0">
                         <a:latin typeface="Malgun Gothic" charset="0"/>
                         <a:ea typeface="Malgun Gothic" charset="0"/>
                         <a:cs typeface="Malgun Gothic" charset="0"/>
@@ -5003,7 +4925,7 @@
                   </a:tcPr>
                 </a:tc>
               </a:tr>
-              <a:tr h="502920">
+              <a:tr h="438912">
                 <a:tc>
                   <a:txBody>
                     <a:bodyPr/>
@@ -5013,7 +4935,7 @@
                         <a:buNone/>
                       </a:pPr>
                       <a:r>
-                        <a:rPr lang="en-US" sz="1200" b="1" dirty="0">
+                        <a:rPr lang="en-US" sz="1150" b="1" dirty="0">
                           <a:solidFill>
                             <a:srgbClr val="ECECEF"/>
                           </a:solidFill>
@@ -5023,7 +4945,7 @@
                         </a:rPr>
                         <a:t>전자상거래법 (청약철회)</a:t>
                       </a:r>
-                      <a:endParaRPr lang="en-US" sz="1200" dirty="0">
+                      <a:endParaRPr lang="en-US" sz="1150" dirty="0">
                         <a:latin typeface="Noto Serif KR" charset="0"/>
                         <a:ea typeface="Noto Serif KR" charset="0"/>
                         <a:cs typeface="Noto Serif KR" charset="0"/>
@@ -5081,7 +5003,7 @@
                         <a:buNone/>
                       </a:pPr>
                       <a:r>
-                        <a:rPr lang="en-US" sz="1200" dirty="0">
+                        <a:rPr lang="en-US" sz="1150" dirty="0">
                           <a:solidFill>
                             <a:srgbClr val="B7B8C0"/>
                           </a:solidFill>
@@ -5089,9 +5011,9 @@
                           <a:ea typeface="Malgun Gothic" pitchFamily="34" charset="-122"/>
                           <a:cs typeface="Malgun Gothic" pitchFamily="34" charset="-120"/>
                         </a:rPr>
-                        <a:t>7일 100% 환불 보장. 결제·환불 시스템 자평이 운영</a:t>
+                        <a:t>7일 100% 환불 보장. 결제·환불 자평이 운영</a:t>
                       </a:r>
-                      <a:endParaRPr lang="en-US" sz="1200" dirty="0">
+                      <a:endParaRPr lang="en-US" sz="1150" dirty="0">
                         <a:latin typeface="Malgun Gothic" charset="0"/>
                         <a:ea typeface="Malgun Gothic" charset="0"/>
                         <a:cs typeface="Malgun Gothic" charset="0"/>
@@ -5141,7 +5063,7 @@
                   </a:tcPr>
                 </a:tc>
               </a:tr>
-              <a:tr h="502920">
+              <a:tr h="438912">
                 <a:tc>
                   <a:txBody>
                     <a:bodyPr/>
@@ -5151,7 +5073,7 @@
                         <a:buNone/>
                       </a:pPr>
                       <a:r>
-                        <a:rPr lang="en-US" sz="1200" b="1" dirty="0">
+                        <a:rPr lang="en-US" sz="1150" b="1" dirty="0">
                           <a:solidFill>
                             <a:srgbClr val="ECECEF"/>
                           </a:solidFill>
@@ -5161,7 +5083,7 @@
                         </a:rPr>
                         <a:t>통신판매법 (녹취·고지)</a:t>
                       </a:r>
-                      <a:endParaRPr lang="en-US" sz="1200" dirty="0">
+                      <a:endParaRPr lang="en-US" sz="1150" dirty="0">
                         <a:latin typeface="Noto Serif KR" charset="0"/>
                         <a:ea typeface="Noto Serif KR" charset="0"/>
                         <a:cs typeface="Noto Serif KR" charset="0"/>
@@ -5219,7 +5141,7 @@
                         <a:buNone/>
                       </a:pPr>
                       <a:r>
-                        <a:rPr lang="en-US" sz="1200" dirty="0">
+                        <a:rPr lang="en-US" sz="1150" dirty="0">
                           <a:solidFill>
                             <a:srgbClr val="B7B8C0"/>
                           </a:solidFill>
@@ -5227,9 +5149,9 @@
                           <a:ea typeface="Malgun Gothic" pitchFamily="34" charset="-122"/>
                           <a:cs typeface="Malgun Gothic" pitchFamily="34" charset="-120"/>
                         </a:rPr>
-                        <a:t>자평 약관·고지 멘트 공급. 녹취만 TM이 보관</a:t>
+                        <a:t>자평 약관·고지 멘트 공급. 녹취만 TM 보관</a:t>
                       </a:r>
-                      <a:endParaRPr lang="en-US" sz="1200" dirty="0">
+                      <a:endParaRPr lang="en-US" sz="1150" dirty="0">
                         <a:latin typeface="Malgun Gothic" charset="0"/>
                         <a:ea typeface="Malgun Gothic" charset="0"/>
                         <a:cs typeface="Malgun Gothic" charset="0"/>
@@ -5279,7 +5201,7 @@
                   </a:tcPr>
                 </a:tc>
               </a:tr>
-              <a:tr h="502920">
+              <a:tr h="438912">
                 <a:tc>
                   <a:txBody>
                     <a:bodyPr/>
@@ -5289,7 +5211,7 @@
                         <a:buNone/>
                       </a:pPr>
                       <a:r>
-                        <a:rPr lang="en-US" sz="1200" b="1" dirty="0">
+                        <a:rPr lang="en-US" sz="1150" b="1" dirty="0">
                           <a:solidFill>
                             <a:srgbClr val="ECECEF"/>
                           </a:solidFill>
@@ -5299,7 +5221,7 @@
                         </a:rPr>
                         <a:t>개인정보보호법</a:t>
                       </a:r>
-                      <a:endParaRPr lang="en-US" sz="1200" dirty="0">
+                      <a:endParaRPr lang="en-US" sz="1150" dirty="0">
                         <a:latin typeface="Noto Serif KR" charset="0"/>
                         <a:ea typeface="Noto Serif KR" charset="0"/>
                         <a:cs typeface="Noto Serif KR" charset="0"/>
@@ -5357,7 +5279,7 @@
                         <a:buNone/>
                       </a:pPr>
                       <a:r>
-                        <a:rPr lang="en-US" sz="1200" dirty="0">
+                        <a:rPr lang="en-US" sz="1150" dirty="0">
                           <a:solidFill>
                             <a:srgbClr val="B7B8C0"/>
                           </a:solidFill>
@@ -5365,9 +5287,9 @@
                           <a:ea typeface="Malgun Gothic" pitchFamily="34" charset="-122"/>
                           <a:cs typeface="Malgun Gothic" pitchFamily="34" charset="-120"/>
                         </a:rPr>
-                        <a:t>자평이 PIMS 수준 보안. TM은 결제 링크만 전송</a:t>
+                        <a:t>자평 PIMS 수준 보안. TM은 결제 링크만 전송</a:t>
                       </a:r>
-                      <a:endParaRPr lang="en-US" sz="1200" dirty="0">
+                      <a:endParaRPr lang="en-US" sz="1150" dirty="0">
                         <a:latin typeface="Malgun Gothic" charset="0"/>
                         <a:ea typeface="Malgun Gothic" charset="0"/>
                         <a:cs typeface="Malgun Gothic" charset="0"/>
@@ -5417,7 +5339,7 @@
                   </a:tcPr>
                 </a:tc>
               </a:tr>
-              <a:tr h="502920">
+              <a:tr h="438912">
                 <a:tc>
                   <a:txBody>
                     <a:bodyPr/>
@@ -5427,7 +5349,7 @@
                         <a:buNone/>
                       </a:pPr>
                       <a:r>
-                        <a:rPr lang="en-US" sz="1200" b="1" dirty="0">
+                        <a:rPr lang="en-US" sz="1150" b="1" dirty="0">
                           <a:solidFill>
                             <a:srgbClr val="ECECEF"/>
                           </a:solidFill>
@@ -5435,9 +5357,9 @@
                           <a:ea typeface="Noto Serif KR" pitchFamily="34" charset="-122"/>
                           <a:cs typeface="Noto Serif KR" pitchFamily="34" charset="-120"/>
                         </a:rPr>
-                        <a:t>위기 키워드 (자살·자해)</a:t>
+                        <a:t>다크패턴 (자동갱신)</a:t>
                       </a:r>
-                      <a:endParaRPr lang="en-US" sz="1200" dirty="0">
+                      <a:endParaRPr lang="en-US" sz="1150" dirty="0">
                         <a:latin typeface="Noto Serif KR" charset="0"/>
                         <a:ea typeface="Noto Serif KR" charset="0"/>
                         <a:cs typeface="Noto Serif KR" charset="0"/>
@@ -5495,7 +5417,7 @@
                         <a:buNone/>
                       </a:pPr>
                       <a:r>
-                        <a:rPr lang="en-US" sz="1200" dirty="0">
+                        <a:rPr lang="en-US" sz="1150" dirty="0">
                           <a:solidFill>
                             <a:srgbClr val="B7B8C0"/>
                           </a:solidFill>
@@ -5503,9 +5425,9 @@
                           <a:ea typeface="Malgun Gothic" pitchFamily="34" charset="-122"/>
                           <a:cs typeface="Malgun Gothic" pitchFamily="34" charset="-120"/>
                         </a:rPr>
-                        <a:t>자평 가드레일이 즉시 109 안내로 단축</a:t>
+                        <a:t>opt-in 디폴트 OFF. 갱신 30/7/1일 전 3회 알림</a:t>
                       </a:r>
-                      <a:endParaRPr lang="en-US" sz="1200" dirty="0">
+                      <a:endParaRPr lang="en-US" sz="1150" dirty="0">
                         <a:latin typeface="Malgun Gothic" charset="0"/>
                         <a:ea typeface="Malgun Gothic" charset="0"/>
                         <a:cs typeface="Malgun Gothic" charset="0"/>
@@ -5555,7 +5477,7 @@
                   </a:tcPr>
                 </a:tc>
               </a:tr>
-              <a:tr h="502920">
+              <a:tr h="438912">
                 <a:tc>
                   <a:txBody>
                     <a:bodyPr/>
@@ -5565,7 +5487,7 @@
                         <a:buNone/>
                       </a:pPr>
                       <a:r>
-                        <a:rPr lang="en-US" sz="1200" b="1" dirty="0">
+                        <a:rPr lang="en-US" sz="1150" b="1" dirty="0">
                           <a:solidFill>
                             <a:srgbClr val="ECECEF"/>
                           </a:solidFill>
@@ -5573,9 +5495,9 @@
                           <a:ea typeface="Noto Serif KR" pitchFamily="34" charset="-122"/>
                           <a:cs typeface="Noto Serif KR" pitchFamily="34" charset="-120"/>
                         </a:rPr>
-                        <a:t>환불 분쟁 회수</a:t>
+                        <a:t>위기 키워드 (자살·자해)</a:t>
                       </a:r>
-                      <a:endParaRPr lang="en-US" sz="1200" dirty="0">
+                      <a:endParaRPr lang="en-US" sz="1150" dirty="0">
                         <a:latin typeface="Noto Serif KR" charset="0"/>
                         <a:ea typeface="Noto Serif KR" charset="0"/>
                         <a:cs typeface="Noto Serif KR" charset="0"/>
@@ -5633,7 +5555,7 @@
                         <a:buNone/>
                       </a:pPr>
                       <a:r>
-                        <a:rPr lang="en-US" sz="1200" dirty="0">
+                        <a:rPr lang="en-US" sz="1150" dirty="0">
                           <a:solidFill>
                             <a:srgbClr val="B7B8C0"/>
                           </a:solidFill>
@@ -5641,9 +5563,9 @@
                           <a:ea typeface="Malgun Gothic" pitchFamily="34" charset="-122"/>
                           <a:cs typeface="Malgun Gothic" pitchFamily="34" charset="-120"/>
                         </a:rPr>
-                        <a:t>자평이 100% 처리. TM은 회수 책임 없음</a:t>
+                        <a:t>자평 가드레일 즉시 1393 안내로 단축</a:t>
                       </a:r>
-                      <a:endParaRPr lang="en-US" sz="1200" dirty="0">
+                      <a:endParaRPr lang="en-US" sz="1150" dirty="0">
                         <a:latin typeface="Malgun Gothic" charset="0"/>
                         <a:ea typeface="Malgun Gothic" charset="0"/>
                         <a:cs typeface="Malgun Gothic" charset="0"/>
@@ -5693,7 +5615,7 @@
                   </a:tcPr>
                 </a:tc>
               </a:tr>
-              <a:tr h="502920">
+              <a:tr h="438912">
                 <a:tc>
                   <a:txBody>
                     <a:bodyPr/>
@@ -5703,7 +5625,7 @@
                         <a:buNone/>
                       </a:pPr>
                       <a:r>
-                        <a:rPr lang="en-US" sz="1200" b="1" dirty="0">
+                        <a:rPr lang="en-US" sz="1150" b="1" dirty="0">
                           <a:solidFill>
                             <a:srgbClr val="ECECEF"/>
                           </a:solidFill>
@@ -5711,9 +5633,9 @@
                           <a:ea typeface="Noto Serif KR" pitchFamily="34" charset="-122"/>
                           <a:cs typeface="Noto Serif KR" pitchFamily="34" charset="-120"/>
                         </a:rPr>
-                        <a:t>"사주 안 맞다" 클레임</a:t>
+                        <a:t>환불 분쟁 회수</a:t>
                       </a:r>
-                      <a:endParaRPr lang="en-US" sz="1200" dirty="0">
+                      <a:endParaRPr lang="en-US" sz="1150" dirty="0">
                         <a:latin typeface="Noto Serif KR" charset="0"/>
                         <a:ea typeface="Noto Serif KR" charset="0"/>
                         <a:cs typeface="Noto Serif KR" charset="0"/>
@@ -5771,7 +5693,7 @@
                         <a:buNone/>
                       </a:pPr>
                       <a:r>
-                        <a:rPr lang="en-US" sz="1200" dirty="0">
+                        <a:rPr lang="en-US" sz="1150" dirty="0">
                           <a:solidFill>
                             <a:srgbClr val="B7B8C0"/>
                           </a:solidFill>
@@ -5779,9 +5701,147 @@
                           <a:ea typeface="Malgun Gothic" pitchFamily="34" charset="-122"/>
                           <a:cs typeface="Malgun Gothic" pitchFamily="34" charset="-120"/>
                         </a:rPr>
-                        <a:t>약관에 참고용 명시 + 자문위원 무료 추가 상담 1차 대응</a:t>
+                        <a:t>자평 100% 처리. TM은 회수 책임 없음</a:t>
                       </a:r>
-                      <a:endParaRPr lang="en-US" sz="1200" dirty="0">
+                      <a:endParaRPr lang="en-US" sz="1150" dirty="0">
+                        <a:latin typeface="Malgun Gothic" charset="0"/>
+                        <a:ea typeface="Malgun Gothic" charset="0"/>
+                        <a:cs typeface="Malgun Gothic" charset="0"/>
+                      </a:endParaRPr>
+                    </a:p>
+                  </a:txBody>
+                  <a:tcPr marL="101600" marR="101600" marT="50800" marB="50800" anchor="ctr">
+                    <a:lnL w="6350" cap="flat" cmpd="sng" algn="ctr">
+                      <a:solidFill>
+                        <a:srgbClr val="2A2E3A"/>
+                      </a:solidFill>
+                      <a:prstDash val="solid"/>
+                      <a:round/>
+                      <a:headEnd type="none" w="med" len="med"/>
+                      <a:tailEnd type="none" w="med" len="med"/>
+                    </a:lnL>
+                    <a:lnR w="6350" cap="flat" cmpd="sng" algn="ctr">
+                      <a:solidFill>
+                        <a:srgbClr val="2A2E3A"/>
+                      </a:solidFill>
+                      <a:prstDash val="solid"/>
+                      <a:round/>
+                      <a:headEnd type="none" w="med" len="med"/>
+                      <a:tailEnd type="none" w="med" len="med"/>
+                    </a:lnR>
+                    <a:lnT w="6350" cap="flat" cmpd="sng" algn="ctr">
+                      <a:solidFill>
+                        <a:srgbClr val="2A2E3A"/>
+                      </a:solidFill>
+                      <a:prstDash val="solid"/>
+                      <a:round/>
+                      <a:headEnd type="none" w="med" len="med"/>
+                      <a:tailEnd type="none" w="med" len="med"/>
+                    </a:lnT>
+                    <a:lnB w="6350" cap="flat" cmpd="sng" algn="ctr">
+                      <a:solidFill>
+                        <a:srgbClr val="2A2E3A"/>
+                      </a:solidFill>
+                      <a:prstDash val="solid"/>
+                      <a:round/>
+                      <a:headEnd type="none" w="med" len="med"/>
+                      <a:tailEnd type="none" w="med" len="med"/>
+                    </a:lnB>
+                    <a:solidFill>
+                      <a:srgbClr val="15171E"/>
+                    </a:solidFill>
+                  </a:tcPr>
+                </a:tc>
+              </a:tr>
+              <a:tr h="438912">
+                <a:tc>
+                  <a:txBody>
+                    <a:bodyPr/>
+                    <a:lstStyle/>
+                    <a:p>
+                      <a:pPr algn="l" indent="0" marL="0">
+                        <a:buNone/>
+                      </a:pPr>
+                      <a:r>
+                        <a:rPr lang="en-US" sz="1150" b="1" dirty="0">
+                          <a:solidFill>
+                            <a:srgbClr val="ECECEF"/>
+                          </a:solidFill>
+                          <a:latin typeface="Noto Serif KR" pitchFamily="34" charset="0"/>
+                          <a:ea typeface="Noto Serif KR" pitchFamily="34" charset="-122"/>
+                          <a:cs typeface="Noto Serif KR" pitchFamily="34" charset="-120"/>
+                        </a:rPr>
+                        <a:t>자녀 사주 윤리</a:t>
+                      </a:r>
+                      <a:endParaRPr lang="en-US" sz="1150" dirty="0">
+                        <a:latin typeface="Noto Serif KR" charset="0"/>
+                        <a:ea typeface="Noto Serif KR" charset="0"/>
+                        <a:cs typeface="Noto Serif KR" charset="0"/>
+                      </a:endParaRPr>
+                    </a:p>
+                  </a:txBody>
+                  <a:tcPr marL="101600" marR="101600" marT="50800" marB="50800" anchor="ctr">
+                    <a:lnL w="6350" cap="flat" cmpd="sng" algn="ctr">
+                      <a:solidFill>
+                        <a:srgbClr val="2A2E3A"/>
+                      </a:solidFill>
+                      <a:prstDash val="solid"/>
+                      <a:round/>
+                      <a:headEnd type="none" w="med" len="med"/>
+                      <a:tailEnd type="none" w="med" len="med"/>
+                    </a:lnL>
+                    <a:lnR w="6350" cap="flat" cmpd="sng" algn="ctr">
+                      <a:solidFill>
+                        <a:srgbClr val="2A2E3A"/>
+                      </a:solidFill>
+                      <a:prstDash val="solid"/>
+                      <a:round/>
+                      <a:headEnd type="none" w="med" len="med"/>
+                      <a:tailEnd type="none" w="med" len="med"/>
+                    </a:lnR>
+                    <a:lnT w="6350" cap="flat" cmpd="sng" algn="ctr">
+                      <a:solidFill>
+                        <a:srgbClr val="2A2E3A"/>
+                      </a:solidFill>
+                      <a:prstDash val="solid"/>
+                      <a:round/>
+                      <a:headEnd type="none" w="med" len="med"/>
+                      <a:tailEnd type="none" w="med" len="med"/>
+                    </a:lnT>
+                    <a:lnB w="6350" cap="flat" cmpd="sng" algn="ctr">
+                      <a:solidFill>
+                        <a:srgbClr val="2A2E3A"/>
+                      </a:solidFill>
+                      <a:prstDash val="solid"/>
+                      <a:round/>
+                      <a:headEnd type="none" w="med" len="med"/>
+                      <a:tailEnd type="none" w="med" len="med"/>
+                    </a:lnB>
+                    <a:solidFill>
+                      <a:srgbClr val="15171E"/>
+                    </a:solidFill>
+                  </a:tcPr>
+                </a:tc>
+                <a:tc>
+                  <a:txBody>
+                    <a:bodyPr/>
+                    <a:lstStyle/>
+                    <a:p>
+                      <a:pPr algn="l" indent="0" marL="0">
+                        <a:buNone/>
+                      </a:pPr>
+                      <a:r>
+                        <a:rPr lang="en-US" sz="1150" dirty="0">
+                          <a:solidFill>
+                            <a:srgbClr val="B7B8C0"/>
+                          </a:solidFill>
+                          <a:latin typeface="Malgun Gothic" pitchFamily="34" charset="0"/>
+                          <a:ea typeface="Malgun Gothic" pitchFamily="34" charset="-122"/>
+                          <a:cs typeface="Malgun Gothic" pitchFamily="34" charset="-120"/>
+                        </a:rPr>
+                        <a:t>자녀 상품 6개월 출시 보류 (D-Day 시나리오 차단)</a:t>
+                      </a:r>
+                      <a:endParaRPr lang="en-US" sz="1150" dirty="0">
                         <a:latin typeface="Malgun Gothic" charset="0"/>
                         <a:ea typeface="Malgun Gothic" charset="0"/>
                         <a:cs typeface="Malgun Gothic" charset="0"/>
@@ -5893,7 +5953,7 @@
                 <a:ea typeface="Noto Serif KR" pitchFamily="34" charset="-122"/>
                 <a:cs typeface="Noto Serif KR" pitchFamily="34" charset="-120"/>
               </a:rPr>
-              <a:t>TM이 안고 가던 법적 책임·환불 회수·민원 부담을 자평이 제도적으로 떠안는 구조</a:t>
+              <a:t>TM이 안고 가던 법적 책임·환불 회수·민원·윤리 부담을 자평이 제도적으로 떠안는 구조</a:t>
             </a:r>
             <a:endParaRPr lang="en-US" sz="1200" dirty="0"/>
           </a:p>
@@ -5995,7 +6055,7 @@
               <a:buNone/>
             </a:pPr>
             <a:r>
-              <a:rPr lang="en-US" sz="2800" b="1" dirty="0">
+              <a:rPr lang="en-US" sz="2600" b="1" dirty="0">
                 <a:solidFill>
                   <a:srgbClr val="ECECEF"/>
                 </a:solidFill>
@@ -6005,7 +6065,7 @@
               </a:rPr>
               <a:t>함께 만들 3단계 — 파일럿부터 확장까지</a:t>
             </a:r>
-            <a:endParaRPr lang="en-US" sz="2800" dirty="0"/>
+            <a:endParaRPr lang="en-US" sz="2600" dirty="0"/>
           </a:p>
         </p:txBody>
       </p:sp>
@@ -6062,7 +6122,7 @@
                 <a:ea typeface="Malgun Gothic" pitchFamily="34" charset="-122"/>
                 <a:cs typeface="Malgun Gothic" pitchFamily="34" charset="-120"/>
               </a:rPr>
-              <a:t>CONFIDENTIAL · PARTNERSHIP</a:t>
+              <a:t>CONFIDENTIAL · PARTNERSHIP · v2</a:t>
             </a:r>
             <a:endParaRPr lang="en-US" sz="900" dirty="0"/>
           </a:p>
@@ -6348,7 +6408,7 @@
               <a:buNone/>
             </a:pPr>
             <a:r>
-              <a:rPr lang="en-US" sz="1200" dirty="0">
+              <a:rPr lang="en-US" sz="1100" dirty="0">
                 <a:solidFill>
                   <a:srgbClr val="B7B8C0"/>
                 </a:solidFill>
@@ -6358,7 +6418,7 @@
               </a:rPr>
               <a:t>상담사 5명 · 일일 콜 2,000건</a:t>
             </a:r>
-            <a:endParaRPr lang="en-US" sz="1200" dirty="0"/>
+            <a:endParaRPr lang="en-US" sz="1100" dirty="0"/>
           </a:p>
           <a:p>
             <a:pPr indent="0" marL="0">
@@ -6368,7 +6428,7 @@
               <a:buNone/>
             </a:pPr>
             <a:r>
-              <a:rPr lang="en-US" sz="1200" dirty="0">
+              <a:rPr lang="en-US" sz="1100" dirty="0">
                 <a:solidFill>
                   <a:srgbClr val="B7B8C0"/>
                 </a:solidFill>
@@ -6376,9 +6436,9 @@
                 <a:ea typeface="Malgun Gothic" pitchFamily="34" charset="-122"/>
                 <a:cs typeface="Malgun Gothic" pitchFamily="34" charset="-120"/>
               </a:rPr>
-              <a:t>가입 100건 목표</a:t>
-            </a:r>
-            <a:endParaRPr lang="en-US" sz="1200" dirty="0"/>
+              <a:t>가입 100건 목표 (Premium 70 + Family 30)</a:t>
+            </a:r>
+            <a:endParaRPr lang="en-US" sz="1100" dirty="0"/>
           </a:p>
           <a:p>
             <a:pPr indent="0" marL="0">
@@ -6388,7 +6448,7 @@
               <a:buNone/>
             </a:pPr>
             <a:r>
-              <a:rPr lang="en-US" sz="1200" dirty="0">
+              <a:rPr lang="en-US" sz="1100" dirty="0">
                 <a:solidFill>
                   <a:srgbClr val="B7B8C0"/>
                 </a:solidFill>
@@ -6398,7 +6458,7 @@
               </a:rPr>
               <a:t>자평: 무상 교육 + CPA 보전 5%</a:t>
             </a:r>
-            <a:endParaRPr lang="en-US" sz="1200" dirty="0"/>
+            <a:endParaRPr lang="en-US" sz="1100" dirty="0"/>
           </a:p>
           <a:p>
             <a:pPr indent="0" marL="0">
@@ -6408,7 +6468,7 @@
               <a:buNone/>
             </a:pPr>
             <a:r>
-              <a:rPr lang="en-US" sz="1200" dirty="0">
+              <a:rPr lang="en-US" sz="1100" dirty="0">
                 <a:solidFill>
                   <a:srgbClr val="B7B8C0"/>
                 </a:solidFill>
@@ -6418,7 +6478,7 @@
               </a:rPr>
               <a:t>→ 종료 시 데이터 리뷰 → 본 계약 협의</a:t>
             </a:r>
-            <a:endParaRPr lang="en-US" sz="1200" dirty="0"/>
+            <a:endParaRPr lang="en-US" sz="1100" dirty="0"/>
           </a:p>
         </p:txBody>
       </p:sp>
@@ -6635,7 +6695,7 @@
               <a:buNone/>
             </a:pPr>
             <a:r>
-              <a:rPr lang="en-US" sz="1200" dirty="0">
+              <a:rPr lang="en-US" sz="1100" dirty="0">
                 <a:solidFill>
                   <a:srgbClr val="B7B8C0"/>
                 </a:solidFill>
@@ -6645,7 +6705,7 @@
               </a:rPr>
               <a:t>상담사 15~20명 확대</a:t>
             </a:r>
-            <a:endParaRPr lang="en-US" sz="1200" dirty="0"/>
+            <a:endParaRPr lang="en-US" sz="1100" dirty="0"/>
           </a:p>
           <a:p>
             <a:pPr indent="0" marL="0">
@@ -6655,7 +6715,7 @@
               <a:buNone/>
             </a:pPr>
             <a:r>
-              <a:rPr lang="en-US" sz="1200" dirty="0">
+              <a:rPr lang="en-US" sz="1100" dirty="0">
                 <a:solidFill>
                   <a:srgbClr val="B7B8C0"/>
                 </a:solidFill>
@@ -6663,9 +6723,9 @@
                 <a:ea typeface="Malgun Gothic" pitchFamily="34" charset="-122"/>
                 <a:cs typeface="Malgun Gothic" pitchFamily="34" charset="-120"/>
               </a:rPr>
-              <a:t>자문위원 풀 확대 (자평 영입)</a:t>
-            </a:r>
-            <a:endParaRPr lang="en-US" sz="1200" dirty="0"/>
+              <a:t>자문위원 풀 확대 (자평 영입, 3년 독점)</a:t>
+            </a:r>
+            <a:endParaRPr lang="en-US" sz="1100" dirty="0"/>
           </a:p>
           <a:p>
             <a:pPr indent="0" marL="0">
@@ -6675,7 +6735,7 @@
               <a:buNone/>
             </a:pPr>
             <a:r>
-              <a:rPr lang="en-US" sz="1200" dirty="0">
+              <a:rPr lang="en-US" sz="1100" dirty="0">
                 <a:solidFill>
                   <a:srgbClr val="B7B8C0"/>
                 </a:solidFill>
@@ -6685,7 +6745,7 @@
               </a:rPr>
               <a:t>갱신 콜 전담팀 분리</a:t>
             </a:r>
-            <a:endParaRPr lang="en-US" sz="1200" dirty="0"/>
+            <a:endParaRPr lang="en-US" sz="1100" dirty="0"/>
           </a:p>
           <a:p>
             <a:pPr indent="0" marL="0">
@@ -6695,7 +6755,7 @@
               <a:buNone/>
             </a:pPr>
             <a:r>
-              <a:rPr lang="en-US" sz="1200" dirty="0">
+              <a:rPr lang="en-US" sz="1100" dirty="0">
                 <a:solidFill>
                   <a:srgbClr val="B7B8C0"/>
                 </a:solidFill>
@@ -6705,7 +6765,7 @@
               </a:rPr>
               <a:t>월 가입 300~500건 목표</a:t>
             </a:r>
-            <a:endParaRPr lang="en-US" sz="1200" dirty="0"/>
+            <a:endParaRPr lang="en-US" sz="1100" dirty="0"/>
           </a:p>
         </p:txBody>
       </p:sp>
@@ -6922,7 +6982,7 @@
               <a:buNone/>
             </a:pPr>
             <a:r>
-              <a:rPr lang="en-US" sz="1200" dirty="0">
+              <a:rPr lang="en-US" sz="1100" dirty="0">
                 <a:solidFill>
                   <a:srgbClr val="B7B8C0"/>
                 </a:solidFill>
@@ -6930,9 +6990,9 @@
                 <a:ea typeface="Malgun Gothic" pitchFamily="34" charset="-122"/>
                 <a:cs typeface="Malgun Gothic" pitchFamily="34" charset="-120"/>
               </a:rPr>
-              <a:t>가족·B2B(기업 임원 코칭) 세그먼트</a:t>
-            </a:r>
-            <a:endParaRPr lang="en-US" sz="1200" dirty="0"/>
+              <a:t>B2B(기업 임원 코칭) 세그먼트 — TM 채널 영업</a:t>
+            </a:r>
+            <a:endParaRPr lang="en-US" sz="1100" dirty="0"/>
           </a:p>
           <a:p>
             <a:pPr indent="0" marL="0">
@@ -6942,7 +7002,7 @@
               <a:buNone/>
             </a:pPr>
             <a:r>
-              <a:rPr lang="en-US" sz="1200" dirty="0">
+              <a:rPr lang="en-US" sz="1100" dirty="0">
                 <a:solidFill>
                   <a:srgbClr val="B7B8C0"/>
                 </a:solidFill>
@@ -6952,7 +7012,7 @@
               </a:rPr>
               <a:t>지역 독점 협의</a:t>
             </a:r>
-            <a:endParaRPr lang="en-US" sz="1200" dirty="0"/>
+            <a:endParaRPr lang="en-US" sz="1100" dirty="0"/>
           </a:p>
           <a:p>
             <a:pPr indent="0" marL="0">
@@ -6962,7 +7022,7 @@
               <a:buNone/>
             </a:pPr>
             <a:r>
-              <a:rPr lang="en-US" sz="1200" dirty="0">
+              <a:rPr lang="en-US" sz="1100" dirty="0">
                 <a:solidFill>
                   <a:srgbClr val="B7B8C0"/>
                 </a:solidFill>
@@ -6972,7 +7032,7 @@
               </a:rPr>
               <a:t>자평 광고 인입 → TM 클로징 협업</a:t>
             </a:r>
-            <a:endParaRPr lang="en-US" sz="1200" dirty="0"/>
+            <a:endParaRPr lang="en-US" sz="1100" dirty="0"/>
           </a:p>
           <a:p>
             <a:pPr indent="0" marL="0">
@@ -6982,7 +7042,7 @@
               <a:buNone/>
             </a:pPr>
             <a:r>
-              <a:rPr lang="en-US" sz="1200" dirty="0">
+              <a:rPr lang="en-US" sz="1100" dirty="0">
                 <a:solidFill>
                   <a:srgbClr val="B7B8C0"/>
                 </a:solidFill>
@@ -6992,7 +7052,7 @@
               </a:rPr>
               <a:t>연 매출 30억+ 시나리오</a:t>
             </a:r>
-            <a:endParaRPr lang="en-US" sz="1200" dirty="0"/>
+            <a:endParaRPr lang="en-US" sz="1100" dirty="0"/>
           </a:p>
         </p:txBody>
       </p:sp>
@@ -7131,7 +7191,7 @@
               <a:buNone/>
             </a:pPr>
             <a:r>
-              <a:rPr lang="en-US" sz="2800" b="1" dirty="0">
+              <a:rPr lang="en-US" sz="2600" b="1" dirty="0">
                 <a:solidFill>
                   <a:srgbClr val="ECECEF"/>
                 </a:solidFill>
@@ -7141,7 +7201,7 @@
               </a:rPr>
               <a:t>이번 미팅 후 2주 내 결론 부탁드립니다</a:t>
             </a:r>
-            <a:endParaRPr lang="en-US" sz="2800" dirty="0"/>
+            <a:endParaRPr lang="en-US" sz="2600" dirty="0"/>
           </a:p>
         </p:txBody>
       </p:sp>
@@ -7198,7 +7258,7 @@
                 <a:ea typeface="Malgun Gothic" pitchFamily="34" charset="-122"/>
                 <a:cs typeface="Malgun Gothic" pitchFamily="34" charset="-120"/>
               </a:rPr>
-              <a:t>CONFIDENTIAL · PARTNERSHIP</a:t>
+              <a:t>CONFIDENTIAL · PARTNERSHIP · v2</a:t>
             </a:r>
             <a:endParaRPr lang="en-US" sz="900" dirty="0"/>
           </a:p>
@@ -8192,7 +8252,7 @@
                 <a:ea typeface="Noto Serif KR" pitchFamily="34" charset="-122"/>
                 <a:cs typeface="Noto Serif KR" pitchFamily="34" charset="-120"/>
               </a:rPr>
-              <a:t>첫 30일 KPI 리뷰</a:t>
+              <a:t>첫 30일 KPI 리뷰 (티어 믹스 포함)</a:t>
             </a:r>
             <a:endParaRPr lang="en-US" sz="1400" dirty="0"/>
           </a:p>
@@ -8542,7 +8602,7 @@
                 <a:ea typeface="Malgun Gothic" pitchFamily="34" charset="-122"/>
                 <a:cs typeface="Malgun Gothic" pitchFamily="34" charset="-120"/>
               </a:rPr>
-              <a:t>CONFIDENTIAL · PARTNERSHIP</a:t>
+              <a:t>CONFIDENTIAL · PARTNERSHIP · v2</a:t>
             </a:r>
             <a:endParaRPr lang="en-US" sz="900" dirty="0"/>
           </a:p>
@@ -9062,7 +9122,7 @@
               <a:buNone/>
             </a:pPr>
             <a:r>
-              <a:rPr lang="en-US" sz="2800" b="1" dirty="0">
+              <a:rPr lang="en-US" sz="2600" b="1" dirty="0">
                 <a:solidFill>
                   <a:srgbClr val="ECECEF"/>
                 </a:solidFill>
@@ -9072,7 +9132,7 @@
               </a:rPr>
               <a:t>1분 안에 — 자평이 TM에 잘 맞는 이유</a:t>
             </a:r>
-            <a:endParaRPr lang="en-US" sz="2800" dirty="0"/>
+            <a:endParaRPr lang="en-US" sz="2600" dirty="0"/>
           </a:p>
         </p:txBody>
       </p:sp>
@@ -9129,7 +9189,7 @@
                 <a:ea typeface="Malgun Gothic" pitchFamily="34" charset="-122"/>
                 <a:cs typeface="Malgun Gothic" pitchFamily="34" charset="-120"/>
               </a:rPr>
-              <a:t>CONFIDENTIAL · PARTNERSHIP</a:t>
+              <a:t>CONFIDENTIAL · PARTNERSHIP · v2</a:t>
             </a:r>
             <a:endParaRPr lang="en-US" sz="900" dirty="0"/>
           </a:p>
@@ -9302,7 +9362,7 @@
                 <a:ea typeface="Malgun Gothic" pitchFamily="34" charset="-122"/>
                 <a:cs typeface="Malgun Gothic" pitchFamily="34" charset="-120"/>
               </a:rPr>
-              <a:t>AI + 명리 자문위원이 함께하는</a:t>
+              <a:t>AI 보조 고전 해석 +</a:t>
             </a:r>
             <a:endParaRPr lang="en-US" sz="1400" dirty="0"/>
           </a:p>
@@ -9322,7 +9382,7 @@
                 <a:ea typeface="Malgun Gothic" pitchFamily="34" charset="-122"/>
                 <a:cs typeface="Malgun Gothic" pitchFamily="34" charset="-120"/>
               </a:rPr>
-              <a:t>사주 자문 SaaS</a:t>
+              <a:t>명리 자문위원 사주 SaaS</a:t>
             </a:r>
             <a:endParaRPr lang="en-US" sz="1400" dirty="0"/>
           </a:p>
@@ -9386,7 +9446,7 @@
                 <a:ea typeface="Noto Serif KR" pitchFamily="34" charset="-122"/>
                 <a:cs typeface="Noto Serif KR" pitchFamily="34" charset="-120"/>
               </a:rPr>
-              <a:t>단가</a:t>
+              <a:t>TM 전용 단가</a:t>
             </a:r>
             <a:endParaRPr lang="en-US" sz="1100" dirty="0"/>
           </a:p>
@@ -9428,7 +9488,7 @@
                 <a:ea typeface="Malgun Gothic" pitchFamily="34" charset="-122"/>
                 <a:cs typeface="Malgun Gothic" pitchFamily="34" charset="-120"/>
               </a:rPr>
-              <a:t>39 / 89 / 180만 원</a:t>
+              <a:t>Premium 39만 / Family 59만</a:t>
             </a:r>
             <a:endParaRPr lang="en-US" sz="1400" dirty="0"/>
           </a:p>
@@ -9448,7 +9508,7 @@
                 <a:ea typeface="Malgun Gothic" pitchFamily="34" charset="-122"/>
                 <a:cs typeface="Malgun Gothic" pitchFamily="34" charset="-120"/>
               </a:rPr>
-              <a:t>(연 일시불, 3티어)</a:t>
+              <a:t>(연 일시불)</a:t>
             </a:r>
             <a:endParaRPr lang="en-US" sz="1400" dirty="0"/>
           </a:p>
@@ -9554,7 +9614,7 @@
                 <a:ea typeface="Malgun Gothic" pitchFamily="34" charset="-122"/>
                 <a:cs typeface="Malgun Gothic" pitchFamily="34" charset="-120"/>
               </a:rPr>
-              <a:t>계약가의 20~30%</a:t>
+              <a:t>Premium 35% (~13.6만)</a:t>
             </a:r>
             <a:endParaRPr lang="en-US" sz="1400" dirty="0"/>
           </a:p>
@@ -9574,7 +9634,7 @@
                 <a:ea typeface="Malgun Gothic" pitchFamily="34" charset="-122"/>
                 <a:cs typeface="Malgun Gothic" pitchFamily="34" charset="-120"/>
               </a:rPr>
-              <a:t>프리미엄 1건 약 22만 원</a:t>
+              <a:t>Family 40% (~23.6만)</a:t>
             </a:r>
             <a:endParaRPr lang="en-US" sz="1400" dirty="0"/>
           </a:p>
@@ -9680,7 +9740,7 @@
                 <a:ea typeface="Malgun Gothic" pitchFamily="34" charset="-122"/>
                 <a:cs typeface="Malgun Gothic" pitchFamily="34" charset="-120"/>
               </a:rPr>
-              <a:t>약 10~14만 원</a:t>
+              <a:t>약 1.6 ~ 12만 원</a:t>
             </a:r>
             <a:endParaRPr lang="en-US" sz="1400" dirty="0"/>
           </a:p>
@@ -9700,7 +9760,7 @@
                 <a:ea typeface="Malgun Gothic" pitchFamily="34" charset="-122"/>
                 <a:cs typeface="Malgun Gothic" pitchFamily="34" charset="-120"/>
               </a:rPr>
-              <a:t>(CAC 차감 후, 대행사 입장)</a:t>
+              <a:t>(CAC 12만 차감 후)</a:t>
             </a:r>
             <a:endParaRPr lang="en-US" sz="1400" dirty="0"/>
           </a:p>
@@ -10016,7 +10076,7 @@
                 <a:ea typeface="Noto Serif KR" pitchFamily="34" charset="-122"/>
                 <a:cs typeface="Noto Serif KR" pitchFamily="34" charset="-120"/>
               </a:rPr>
-              <a:t>단가가 높고, 자문위원 1:1 클로징 카드가 명확하며, 위탁 운영 부담이 낮은  ·  보기 드문 TM 친화 상품</a:t>
+              <a:t>SKU 물리적 분리(Basic/Std=Self-serve, Prem/Family=TM)  ·  자문위원 회차 독립  ·  법무 리스크 자평이 100% 헷지</a:t>
             </a:r>
             <a:endParaRPr lang="en-US" sz="1300" dirty="0"/>
           </a:p>
@@ -10118,7 +10178,7 @@
               <a:buNone/>
             </a:pPr>
             <a:r>
-              <a:rPr lang="en-US" sz="2800" b="1" dirty="0">
+              <a:rPr lang="en-US" sz="2600" b="1" dirty="0">
                 <a:solidFill>
                   <a:srgbClr val="ECECEF"/>
                 </a:solidFill>
@@ -10126,9 +10186,9 @@
                 <a:ea typeface="Noto Serif KR" pitchFamily="34" charset="-122"/>
                 <a:cs typeface="Noto Serif KR" pitchFamily="34" charset="-120"/>
               </a:rPr>
-              <a:t>한국 사주 시장 — 4조 규모, 디지털은 아직 5% 미만</a:t>
-            </a:r>
-            <a:endParaRPr lang="en-US" sz="2800" dirty="0"/>
+              <a:t>한국 사주 시장 — 1~4조 규모 추산, 디지털 5% 미만</a:t>
+            </a:r>
+            <a:endParaRPr lang="en-US" sz="2600" dirty="0"/>
           </a:p>
         </p:txBody>
       </p:sp>
@@ -10185,7 +10245,7 @@
                 <a:ea typeface="Malgun Gothic" pitchFamily="34" charset="-122"/>
                 <a:cs typeface="Malgun Gothic" pitchFamily="34" charset="-120"/>
               </a:rPr>
-              <a:t>CONFIDENTIAL · PARTNERSHIP</a:t>
+              <a:t>CONFIDENTIAL · PARTNERSHIP · v2</a:t>
             </a:r>
             <a:endParaRPr lang="en-US" sz="900" dirty="0"/>
           </a:p>
@@ -10308,7 +10368,7 @@
               <a:buNone/>
             </a:pPr>
             <a:r>
-              <a:rPr lang="en-US" sz="5400" b="1" dirty="0">
+              <a:rPr lang="en-US" sz="4800" b="1" dirty="0">
                 <a:solidFill>
                   <a:srgbClr val="C9A961"/>
                 </a:solidFill>
@@ -10316,9 +10376,9 @@
                 <a:ea typeface="Noto Serif KR" pitchFamily="34" charset="-122"/>
                 <a:cs typeface="Noto Serif KR" pitchFamily="34" charset="-120"/>
               </a:rPr>
-              <a:t>4조</a:t>
-            </a:r>
-            <a:endParaRPr lang="en-US" sz="5400" dirty="0"/>
+              <a:t>1~4조</a:t>
+            </a:r>
+            <a:endParaRPr lang="en-US" sz="4800" dirty="0"/>
           </a:p>
         </p:txBody>
       </p:sp>
@@ -10355,7 +10415,7 @@
                 <a:ea typeface="Malgun Gothic" pitchFamily="34" charset="-122"/>
                 <a:cs typeface="Malgun Gothic" pitchFamily="34" charset="-120"/>
               </a:rPr>
-              <a:t>국내 사주·역학 시장 (연)</a:t>
+              <a:t>국내 사주·역학 시장 (추산)</a:t>
             </a:r>
             <a:endParaRPr lang="en-US" sz="1400" dirty="0"/>
           </a:p>
@@ -10394,7 +10454,7 @@
                 <a:ea typeface="Malgun Gothic" pitchFamily="34" charset="-122"/>
                 <a:cs typeface="Malgun Gothic" pitchFamily="34" charset="-120"/>
               </a:rPr>
-              <a:t>출처: 한국역술인협회 등 추산</a:t>
+              <a:t>공식 통계 부재 — 비공식 비중 큼</a:t>
             </a:r>
             <a:endParaRPr lang="en-US" sz="1000" dirty="0"/>
           </a:p>
@@ -10450,7 +10510,7 @@
               <a:buNone/>
             </a:pPr>
             <a:r>
-              <a:rPr lang="en-US" sz="5400" b="1" dirty="0">
+              <a:rPr lang="en-US" sz="4800" b="1" dirty="0">
                 <a:solidFill>
                   <a:srgbClr val="C9A961"/>
                 </a:solidFill>
@@ -10460,7 +10520,7 @@
               </a:rPr>
               <a:t>5% 미만</a:t>
             </a:r>
-            <a:endParaRPr lang="en-US" sz="5400" dirty="0"/>
+            <a:endParaRPr lang="en-US" sz="4800" dirty="0"/>
           </a:p>
         </p:txBody>
       </p:sp>
@@ -10592,7 +10652,7 @@
               <a:buNone/>
             </a:pPr>
             <a:r>
-              <a:rPr lang="en-US" sz="5400" b="1" dirty="0">
+              <a:rPr lang="en-US" sz="4800" b="1" dirty="0">
                 <a:solidFill>
                   <a:srgbClr val="C9A961"/>
                 </a:solidFill>
@@ -10600,9 +10660,9 @@
                 <a:ea typeface="Noto Serif KR" pitchFamily="34" charset="-122"/>
                 <a:cs typeface="Noto Serif KR" pitchFamily="34" charset="-120"/>
               </a:rPr>
-              <a:t>10~15만</a:t>
-            </a:r>
-            <a:endParaRPr lang="en-US" sz="5400" dirty="0"/>
+              <a:t>7~15만</a:t>
+            </a:r>
+            <a:endParaRPr lang="en-US" sz="4800" dirty="0"/>
           </a:p>
         </p:txBody>
       </p:sp>
@@ -10678,7 +10738,7 @@
                 <a:ea typeface="Malgun Gothic" pitchFamily="34" charset="-122"/>
                 <a:cs typeface="Malgun Gothic" pitchFamily="34" charset="-120"/>
               </a:rPr>
-              <a:t>자평 1년 = 명리원 3~5회</a:t>
+              <a:t>자평 Premium 1년 = 명리원 3~5회</a:t>
             </a:r>
             <a:endParaRPr lang="en-US" sz="1000" dirty="0"/>
           </a:p>
@@ -10717,7 +10777,7 @@
                 <a:ea typeface="Noto Serif KR" pitchFamily="34" charset="-122"/>
                 <a:cs typeface="Noto Serif KR" pitchFamily="34" charset="-120"/>
               </a:rPr>
-              <a:t>핵심 타겟  ·  40~60대 여성</a:t>
+              <a:t>핵심 타겟  ·  40~60대 여성 (자평 본진)</a:t>
             </a:r>
             <a:endParaRPr lang="en-US" sz="1800" dirty="0"/>
           </a:p>
@@ -10756,7 +10816,7 @@
                 <a:ea typeface="Malgun Gothic" pitchFamily="34" charset="-122"/>
                 <a:cs typeface="Malgun Gothic" pitchFamily="34" charset="-120"/>
               </a:rPr>
-              <a:t>가족·자녀·결혼·이주 의사결정의 게이트키퍼  ·  TM 채널의 인구·매체 행동·결제 패턴과 정확히 일치</a:t>
+              <a:t>가족·자녀·결혼·이주 의사결정 게이트키퍼  ·  TM 채널 인구·매체 행동·결제 패턴과 일치</a:t>
             </a:r>
             <a:endParaRPr lang="en-US" sz="1300" dirty="0"/>
           </a:p>
@@ -10820,7 +10880,7 @@
                 <a:ea typeface="Noto Serif KR" pitchFamily="34" charset="-122"/>
                 <a:cs typeface="Noto Serif KR" pitchFamily="34" charset="-120"/>
               </a:rPr>
-              <a:t>사주는 결정 시점마다 다시 본다  ·  본인 → 배우자 → 자녀 → 부모  →  자연 갱신·LTV 강함</a:t>
+              <a:t>자평 wedge: 상위 20% '의사결정 자문' 카테고리  ·  락인 후 매출 다변화 (B2B·자문위원·시즌)</a:t>
             </a:r>
             <a:endParaRPr lang="en-US" sz="1300" dirty="0"/>
           </a:p>
@@ -10922,7 +10982,7 @@
               <a:buNone/>
             </a:pPr>
             <a:r>
-              <a:rPr lang="en-US" sz="2800" b="1" dirty="0">
+              <a:rPr lang="en-US" sz="2600" b="1" dirty="0">
                 <a:solidFill>
                   <a:srgbClr val="ECECEF"/>
                 </a:solidFill>
@@ -10930,9 +10990,9 @@
                 <a:ea typeface="Noto Serif KR" pitchFamily="34" charset="-122"/>
                 <a:cs typeface="Noto Serif KR" pitchFamily="34" charset="-120"/>
               </a:rPr>
-              <a:t>자평의 3층 구조 — 다른 사주 앱과 결정적으로 다른 점</a:t>
-            </a:r>
-            <a:endParaRPr lang="en-US" sz="2800" dirty="0"/>
+              <a:t>자평 3층 구조 — 모방 어려운 조합</a:t>
+            </a:r>
+            <a:endParaRPr lang="en-US" sz="2600" dirty="0"/>
           </a:p>
         </p:txBody>
       </p:sp>
@@ -10989,7 +11049,7 @@
                 <a:ea typeface="Malgun Gothic" pitchFamily="34" charset="-122"/>
                 <a:cs typeface="Malgun Gothic" pitchFamily="34" charset="-120"/>
               </a:rPr>
-              <a:t>CONFIDENTIAL · PARTNERSHIP</a:t>
+              <a:t>CONFIDENTIAL · PARTNERSHIP · v2</a:t>
             </a:r>
             <a:endParaRPr lang="en-US" sz="900" dirty="0"/>
           </a:p>
@@ -11171,7 +11231,7 @@
               <a:buNone/>
             </a:pPr>
             <a:r>
-              <a:rPr lang="en-US" sz="1800" b="1" dirty="0">
+              <a:rPr lang="en-US" sz="1700" b="1" dirty="0">
                 <a:solidFill>
                   <a:srgbClr val="ECECEF"/>
                 </a:solidFill>
@@ -11181,7 +11241,7 @@
               </a:rPr>
               <a:t>룰베이스 명리 엔진</a:t>
             </a:r>
-            <a:endParaRPr lang="en-US" sz="1800" dirty="0"/>
+            <a:endParaRPr lang="en-US" sz="1700" dirty="0"/>
           </a:p>
         </p:txBody>
       </p:sp>
@@ -11459,7 +11519,7 @@
               <a:buNone/>
             </a:pPr>
             <a:r>
-              <a:rPr lang="en-US" sz="1800" b="1" dirty="0">
+              <a:rPr lang="en-US" sz="1700" b="1" dirty="0">
                 <a:solidFill>
                   <a:srgbClr val="ECECEF"/>
                 </a:solidFill>
@@ -11467,9 +11527,9 @@
                 <a:ea typeface="Noto Serif KR" pitchFamily="34" charset="-122"/>
                 <a:cs typeface="Noto Serif KR" pitchFamily="34" charset="-120"/>
               </a:rPr>
-              <a:t>AI 자문 (Claude 기반)</a:t>
-            </a:r>
-            <a:endParaRPr lang="en-US" sz="1800" dirty="0"/>
+              <a:t>AI 보조 고전 해석</a:t>
+            </a:r>
+            <a:endParaRPr lang="en-US" sz="1700" dirty="0"/>
           </a:p>
         </p:txBody>
       </p:sp>
@@ -11506,7 +11566,7 @@
                 <a:ea typeface="Malgun Gothic" pitchFamily="34" charset="-122"/>
                 <a:cs typeface="Malgun Gothic" pitchFamily="34" charset="-120"/>
               </a:rPr>
-              <a:t>고전 인용 의무 · 학파 다양성 표기</a:t>
+              <a:t>고전 인용 의무 · 학파 다양성</a:t>
             </a:r>
             <a:endParaRPr lang="en-US" sz="1100" dirty="0"/>
           </a:p>
@@ -11548,7 +11608,7 @@
                 <a:ea typeface="Malgun Gothic" pitchFamily="34" charset="-122"/>
                 <a:cs typeface="Malgun Gothic" pitchFamily="34" charset="-120"/>
               </a:rPr>
-              <a:t>엔진 결과 위에서 해석만 수행. 연해자평·삼명통회·적천수 등 고전 출처 표기.</a:t>
+              <a:t>엔진 결과 위에서 해석만. 연해자평·삼명통회·적천수 출처 표기.</a:t>
             </a:r>
             <a:endParaRPr lang="en-US" sz="1200" dirty="0"/>
           </a:p>
@@ -11568,7 +11628,7 @@
                 <a:ea typeface="Malgun Gothic" pitchFamily="34" charset="-122"/>
                 <a:cs typeface="Malgun Gothic" pitchFamily="34" charset="-120"/>
               </a:rPr>
-              <a:t>학파별 견해가 갈리는 부분은 솔직하게 'contested' 필드로 명시.</a:t>
+              <a:t>학파별 견해가 갈리는 부분은 'contested' 필드로 솔직히 명시.</a:t>
             </a:r>
             <a:endParaRPr lang="en-US" sz="1200" dirty="0"/>
           </a:p>
@@ -11632,7 +11692,7 @@
                 <a:ea typeface="Malgun Gothic" pitchFamily="34" charset="-122"/>
                 <a:cs typeface="Malgun Gothic" pitchFamily="34" charset="-120"/>
               </a:rPr>
-              <a:t>다중 LLM 교차검증 가능</a:t>
+              <a:t>단정 표현 자동 톤다운</a:t>
             </a:r>
             <a:endParaRPr lang="en-US" sz="900" dirty="0"/>
           </a:p>
@@ -11747,7 +11807,7 @@
               <a:buNone/>
             </a:pPr>
             <a:r>
-              <a:rPr lang="en-US" sz="1800" b="1" dirty="0">
+              <a:rPr lang="en-US" sz="1700" b="1" dirty="0">
                 <a:solidFill>
                   <a:srgbClr val="ECECEF"/>
                 </a:solidFill>
@@ -11757,7 +11817,7 @@
               </a:rPr>
               <a:t>명리 자문위원 (사람)</a:t>
             </a:r>
-            <a:endParaRPr lang="en-US" sz="1800" dirty="0"/>
+            <a:endParaRPr lang="en-US" sz="1700" dirty="0"/>
           </a:p>
         </p:txBody>
       </p:sp>
@@ -11794,7 +11854,7 @@
                 <a:ea typeface="Malgun Gothic" pitchFamily="34" charset="-122"/>
                 <a:cs typeface="Malgun Gothic" pitchFamily="34" charset="-120"/>
               </a:rPr>
-              <a:t>프리미엄/VIP에서 1:1 검증·상담</a:t>
+              <a:t>3년 독점 계약 + 위약금</a:t>
             </a:r>
             <a:endParaRPr lang="en-US" sz="1100" dirty="0"/>
           </a:p>
@@ -11836,7 +11896,7 @@
                 <a:ea typeface="Malgun Gothic" pitchFamily="34" charset="-122"/>
                 <a:cs typeface="Malgun Gothic" pitchFamily="34" charset="-120"/>
               </a:rPr>
-              <a:t>AI가 못 보는 부분을 사람이 마무리합니다.</a:t>
+              <a:t>Premium/Family에서 1:1 검증·상담.</a:t>
             </a:r>
             <a:endParaRPr lang="en-US" sz="1200" dirty="0"/>
           </a:p>
@@ -11856,7 +11916,7 @@
                 <a:ea typeface="Malgun Gothic" pitchFamily="34" charset="-122"/>
                 <a:cs typeface="Malgun Gothic" pitchFamily="34" charset="-120"/>
               </a:rPr>
-              <a:t>전화 상담 1:1, 학파 교차 검토, 가족 종합 진단.</a:t>
+              <a:t>자평이 영입한 5~50명 풀과 3년 독점 계약 — 경쟁사 카피 불가의 실질 해자.</a:t>
             </a:r>
             <a:endParaRPr lang="en-US" sz="1200" dirty="0"/>
           </a:p>
@@ -11920,7 +11980,7 @@
                 <a:ea typeface="Malgun Gothic" pitchFamily="34" charset="-122"/>
                 <a:cs typeface="Malgun Gothic" pitchFamily="34" charset="-120"/>
               </a:rPr>
-              <a:t>프리미엄·VIP 핵심 가치</a:t>
+              <a:t>진짜 해자 ❷</a:t>
             </a:r>
             <a:endParaRPr lang="en-US" sz="900" dirty="0"/>
           </a:p>
@@ -12022,7 +12082,7 @@
               <a:buNone/>
             </a:pPr>
             <a:r>
-              <a:rPr lang="en-US" sz="2800" b="1" dirty="0">
+              <a:rPr lang="en-US" sz="2600" b="1" dirty="0">
                 <a:solidFill>
                   <a:srgbClr val="ECECEF"/>
                 </a:solidFill>
@@ -12032,7 +12092,7 @@
               </a:rPr>
               <a:t>지금 라이브로 작동하는 기능 — 데모 가능</a:t>
             </a:r>
-            <a:endParaRPr lang="en-US" sz="2800" dirty="0"/>
+            <a:endParaRPr lang="en-US" sz="2600" dirty="0"/>
           </a:p>
         </p:txBody>
       </p:sp>
@@ -12089,7 +12149,7 @@
                 <a:ea typeface="Malgun Gothic" pitchFamily="34" charset="-122"/>
                 <a:cs typeface="Malgun Gothic" pitchFamily="34" charset="-120"/>
               </a:rPr>
-              <a:t>CONFIDENTIAL · PARTNERSHIP</a:t>
+              <a:t>CONFIDENTIAL · PARTNERSHIP · v2</a:t>
             </a:r>
             <a:endParaRPr lang="en-US" sz="900" dirty="0"/>
           </a:p>
@@ -13202,7 +13262,7 @@
               <a:buNone/>
             </a:pPr>
             <a:r>
-              <a:rPr lang="en-US" sz="2800" b="1" dirty="0">
+              <a:rPr lang="en-US" sz="2600" b="1" dirty="0">
                 <a:solidFill>
                   <a:srgbClr val="ECECEF"/>
                 </a:solidFill>
@@ -13210,9 +13270,9 @@
                 <a:ea typeface="Noto Serif KR" pitchFamily="34" charset="-122"/>
                 <a:cs typeface="Noto Serif KR" pitchFamily="34" charset="-120"/>
               </a:rPr>
-              <a:t>다른 TM 상품 대비 단가·마진이 5~10배</a:t>
-            </a:r>
-            <a:endParaRPr lang="en-US" sz="2800" dirty="0"/>
+              <a:t>다른 TM 상품 대비 단가·마진이 두꺼움</a:t>
+            </a:r>
+            <a:endParaRPr lang="en-US" sz="2600" dirty="0"/>
           </a:p>
         </p:txBody>
       </p:sp>
@@ -13269,7 +13329,7 @@
                 <a:ea typeface="Malgun Gothic" pitchFamily="34" charset="-122"/>
                 <a:cs typeface="Malgun Gothic" pitchFamily="34" charset="-120"/>
               </a:rPr>
-              <a:t>CONFIDENTIAL · PARTNERSHIP</a:t>
+              <a:t>CONFIDENTIAL · PARTNERSHIP · v2</a:t>
             </a:r>
             <a:endParaRPr lang="en-US" sz="900" dirty="0"/>
           </a:p>
@@ -13478,7 +13538,7 @@
                 <a:ea typeface="Noto Serif KR" pitchFamily="34" charset="-122"/>
                 <a:cs typeface="Noto Serif KR" pitchFamily="34" charset="-120"/>
               </a:rPr>
-              <a:t>TM 수수료 (20~30%)</a:t>
+              <a:t>TM 수수료</a:t>
             </a:r>
             <a:endParaRPr lang="en-US" sz="1200" dirty="0"/>
           </a:p>
@@ -13517,7 +13577,7 @@
                 <a:ea typeface="Noto Serif KR" pitchFamily="34" charset="-122"/>
                 <a:cs typeface="Noto Serif KR" pitchFamily="34" charset="-120"/>
               </a:rPr>
-              <a:t>건당 마진 (CAC 100k)</a:t>
+              <a:t>건당 마진 (CAC 10만)</a:t>
             </a:r>
             <a:endParaRPr lang="en-US" sz="1200" dirty="0"/>
           </a:p>
@@ -13532,7 +13592,7 @@
         <p:spPr>
           <a:xfrm>
             <a:off x="548640" y="2286000"/>
-            <a:ext cx="11094415" cy="502920"/>
+            <a:ext cx="11094415" cy="566928"/>
           </a:xfrm>
           <a:prstGeom prst="rect">
             <a:avLst/>
@@ -13557,7 +13617,7 @@
         <p:spPr>
           <a:xfrm>
             <a:off x="731520" y="2286000"/>
-            <a:ext cx="3108960" cy="502920"/>
+            <a:ext cx="3108960" cy="566928"/>
           </a:xfrm>
           <a:prstGeom prst="rect">
             <a:avLst/>
@@ -13596,7 +13656,7 @@
         <p:spPr>
           <a:xfrm>
             <a:off x="3931920" y="2286000"/>
-            <a:ext cx="2194560" cy="502920"/>
+            <a:ext cx="2194560" cy="566928"/>
           </a:xfrm>
           <a:prstGeom prst="rect">
             <a:avLst/>
@@ -13635,7 +13695,7 @@
         <p:spPr>
           <a:xfrm>
             <a:off x="6217920" y="2286000"/>
-            <a:ext cx="2651760" cy="502920"/>
+            <a:ext cx="2651760" cy="566928"/>
           </a:xfrm>
           <a:prstGeom prst="rect">
             <a:avLst/>
@@ -13674,7 +13734,7 @@
         <p:spPr>
           <a:xfrm>
             <a:off x="8961120" y="2286000"/>
-            <a:ext cx="2651760" cy="502920"/>
+            <a:ext cx="2651760" cy="566928"/>
           </a:xfrm>
           <a:prstGeom prst="rect">
             <a:avLst/>
@@ -13712,8 +13772,8 @@
         </p:nvSpPr>
         <p:spPr>
           <a:xfrm>
-            <a:off x="548640" y="2788920"/>
-            <a:ext cx="11094415" cy="502920"/>
+            <a:off x="548640" y="2852928"/>
+            <a:ext cx="11094415" cy="566928"/>
           </a:xfrm>
           <a:prstGeom prst="rect">
             <a:avLst/>
@@ -13737,8 +13797,8 @@
         </p:nvSpPr>
         <p:spPr>
           <a:xfrm>
-            <a:off x="731520" y="2788920"/>
-            <a:ext cx="3108960" cy="502920"/>
+            <a:off x="731520" y="2852928"/>
+            <a:ext cx="3108960" cy="566928"/>
           </a:xfrm>
           <a:prstGeom prst="rect">
             <a:avLst/>
@@ -13776,8 +13836,8 @@
         </p:nvSpPr>
         <p:spPr>
           <a:xfrm>
-            <a:off x="3931920" y="2788920"/>
-            <a:ext cx="2194560" cy="502920"/>
+            <a:off x="3931920" y="2852928"/>
+            <a:ext cx="2194560" cy="566928"/>
           </a:xfrm>
           <a:prstGeom prst="rect">
             <a:avLst/>
@@ -13815,8 +13875,8 @@
         </p:nvSpPr>
         <p:spPr>
           <a:xfrm>
-            <a:off x="6217920" y="2788920"/>
-            <a:ext cx="2651760" cy="502920"/>
+            <a:off x="6217920" y="2852928"/>
+            <a:ext cx="2651760" cy="566928"/>
           </a:xfrm>
           <a:prstGeom prst="rect">
             <a:avLst/>
@@ -13854,8 +13914,8 @@
         </p:nvSpPr>
         <p:spPr>
           <a:xfrm>
-            <a:off x="8961120" y="2788920"/>
-            <a:ext cx="2651760" cy="502920"/>
+            <a:off x="8961120" y="2852928"/>
+            <a:ext cx="2651760" cy="566928"/>
           </a:xfrm>
           <a:prstGeom prst="rect">
             <a:avLst/>
@@ -13893,8 +13953,8 @@
         </p:nvSpPr>
         <p:spPr>
           <a:xfrm>
-            <a:off x="548640" y="3291840"/>
-            <a:ext cx="11094415" cy="502920"/>
+            <a:off x="548640" y="3419856"/>
+            <a:ext cx="11094415" cy="566928"/>
           </a:xfrm>
           <a:prstGeom prst="rect">
             <a:avLst/>
@@ -13918,8 +13978,8 @@
         </p:nvSpPr>
         <p:spPr>
           <a:xfrm>
-            <a:off x="731520" y="3291840"/>
-            <a:ext cx="3108960" cy="502920"/>
+            <a:off x="731520" y="3419856"/>
+            <a:ext cx="3108960" cy="566928"/>
           </a:xfrm>
           <a:prstGeom prst="rect">
             <a:avLst/>
@@ -13957,8 +14017,8 @@
         </p:nvSpPr>
         <p:spPr>
           <a:xfrm>
-            <a:off x="3931920" y="3291840"/>
-            <a:ext cx="2194560" cy="502920"/>
+            <a:off x="3931920" y="3419856"/>
+            <a:ext cx="2194560" cy="566928"/>
           </a:xfrm>
           <a:prstGeom prst="rect">
             <a:avLst/>
@@ -13996,8 +14056,8 @@
         </p:nvSpPr>
         <p:spPr>
           <a:xfrm>
-            <a:off x="6217920" y="3291840"/>
-            <a:ext cx="2651760" cy="502920"/>
+            <a:off x="6217920" y="3419856"/>
+            <a:ext cx="2651760" cy="566928"/>
           </a:xfrm>
           <a:prstGeom prst="rect">
             <a:avLst/>
@@ -14035,8 +14095,8 @@
         </p:nvSpPr>
         <p:spPr>
           <a:xfrm>
-            <a:off x="8961120" y="3291840"/>
-            <a:ext cx="2651760" cy="502920"/>
+            <a:off x="8961120" y="3419856"/>
+            <a:ext cx="2651760" cy="566928"/>
           </a:xfrm>
           <a:prstGeom prst="rect">
             <a:avLst/>
@@ -14074,8 +14134,8 @@
         </p:nvSpPr>
         <p:spPr>
           <a:xfrm>
-            <a:off x="548640" y="3794760"/>
-            <a:ext cx="11094415" cy="502920"/>
+            <a:off x="548640" y="3986784"/>
+            <a:ext cx="11094415" cy="566928"/>
           </a:xfrm>
           <a:prstGeom prst="rect">
             <a:avLst/>
@@ -14099,8 +14159,8 @@
         </p:nvSpPr>
         <p:spPr>
           <a:xfrm>
-            <a:off x="731520" y="3794760"/>
-            <a:ext cx="3108960" cy="502920"/>
+            <a:off x="731520" y="3986784"/>
+            <a:ext cx="3108960" cy="566928"/>
           </a:xfrm>
           <a:prstGeom prst="rect">
             <a:avLst/>
@@ -14138,8 +14198,8 @@
         </p:nvSpPr>
         <p:spPr>
           <a:xfrm>
-            <a:off x="3931920" y="3794760"/>
-            <a:ext cx="2194560" cy="502920"/>
+            <a:off x="3931920" y="3986784"/>
+            <a:ext cx="2194560" cy="566928"/>
           </a:xfrm>
           <a:prstGeom prst="rect">
             <a:avLst/>
@@ -14177,8 +14237,8 @@
         </p:nvSpPr>
         <p:spPr>
           <a:xfrm>
-            <a:off x="6217920" y="3794760"/>
-            <a:ext cx="2651760" cy="502920"/>
+            <a:off x="6217920" y="3986784"/>
+            <a:ext cx="2651760" cy="566928"/>
           </a:xfrm>
           <a:prstGeom prst="rect">
             <a:avLst/>
@@ -14216,8 +14276,8 @@
         </p:nvSpPr>
         <p:spPr>
           <a:xfrm>
-            <a:off x="8961120" y="3794760"/>
-            <a:ext cx="2651760" cy="502920"/>
+            <a:off x="8961120" y="3986784"/>
+            <a:ext cx="2651760" cy="566928"/>
           </a:xfrm>
           <a:prstGeom prst="rect">
             <a:avLst/>
@@ -14255,189 +14315,8 @@
         </p:nvSpPr>
         <p:spPr>
           <a:xfrm>
-            <a:off x="548640" y="4297680"/>
-            <a:ext cx="11094415" cy="502920"/>
-          </a:xfrm>
-          <a:prstGeom prst="rect">
-            <a:avLst/>
-          </a:prstGeom>
-          <a:solidFill>
-            <a:srgbClr val="15171E"/>
-          </a:solidFill>
-          <a:ln w="6350">
-            <a:solidFill>
-              <a:srgbClr val="2A2E3A"/>
-            </a:solidFill>
-            <a:prstDash val="solid"/>
-          </a:ln>
-        </p:spPr>
-      </p:sp>
-      <p:sp>
-        <p:nvSpPr>
-          <p:cNvPr id="33" name="Text 31"/>
-          <p:cNvSpPr/>
-          <p:nvPr/>
-        </p:nvSpPr>
-        <p:spPr>
-          <a:xfrm>
-            <a:off x="731520" y="4297680"/>
-            <a:ext cx="3108960" cy="502920"/>
-          </a:xfrm>
-          <a:prstGeom prst="rect">
-            <a:avLst/>
-          </a:prstGeom>
-          <a:noFill/>
-          <a:ln/>
-        </p:spPr>
-        <p:txBody>
-          <a:bodyPr wrap="square" lIns="0" tIns="0" rIns="0" bIns="0" rtlCol="0" anchor="ctr"/>
-          <a:lstStyle/>
-          <a:p>
-            <a:pPr algn="l" indent="0" marL="0">
-              <a:buNone/>
-            </a:pPr>
-            <a:r>
-              <a:rPr lang="en-US" sz="1300" b="1" dirty="0">
-                <a:solidFill>
-                  <a:srgbClr val="ECECEF"/>
-                </a:solidFill>
-                <a:latin typeface="Noto Serif KR" pitchFamily="34" charset="0"/>
-                <a:ea typeface="Noto Serif KR" pitchFamily="34" charset="-122"/>
-                <a:cs typeface="Noto Serif KR" pitchFamily="34" charset="-120"/>
-              </a:rPr>
-              <a:t>자평 표준</a:t>
-            </a:r>
-            <a:endParaRPr lang="en-US" sz="1300" dirty="0"/>
-          </a:p>
-        </p:txBody>
-      </p:sp>
-      <p:sp>
-        <p:nvSpPr>
-          <p:cNvPr id="34" name="Text 32"/>
-          <p:cNvSpPr/>
-          <p:nvPr/>
-        </p:nvSpPr>
-        <p:spPr>
-          <a:xfrm>
-            <a:off x="3931920" y="4297680"/>
-            <a:ext cx="2194560" cy="502920"/>
-          </a:xfrm>
-          <a:prstGeom prst="rect">
-            <a:avLst/>
-          </a:prstGeom>
-          <a:noFill/>
-          <a:ln/>
-        </p:spPr>
-        <p:txBody>
-          <a:bodyPr wrap="square" lIns="0" tIns="0" rIns="0" bIns="0" rtlCol="0" anchor="ctr"/>
-          <a:lstStyle/>
-          <a:p>
-            <a:pPr algn="ctr" indent="0" marL="0">
-              <a:buNone/>
-            </a:pPr>
-            <a:r>
-              <a:rPr lang="en-US" sz="1300" dirty="0">
-                <a:solidFill>
-                  <a:srgbClr val="ECECEF"/>
-                </a:solidFill>
-                <a:latin typeface="Malgun Gothic" pitchFamily="34" charset="0"/>
-                <a:ea typeface="Malgun Gothic" pitchFamily="34" charset="-122"/>
-                <a:cs typeface="Malgun Gothic" pitchFamily="34" charset="-120"/>
-              </a:rPr>
-              <a:t>39만</a:t>
-            </a:r>
-            <a:endParaRPr lang="en-US" sz="1300" dirty="0"/>
-          </a:p>
-        </p:txBody>
-      </p:sp>
-      <p:sp>
-        <p:nvSpPr>
-          <p:cNvPr id="35" name="Text 33"/>
-          <p:cNvSpPr/>
-          <p:nvPr/>
-        </p:nvSpPr>
-        <p:spPr>
-          <a:xfrm>
-            <a:off x="6217920" y="4297680"/>
-            <a:ext cx="2651760" cy="502920"/>
-          </a:xfrm>
-          <a:prstGeom prst="rect">
-            <a:avLst/>
-          </a:prstGeom>
-          <a:noFill/>
-          <a:ln/>
-        </p:spPr>
-        <p:txBody>
-          <a:bodyPr wrap="square" lIns="0" tIns="0" rIns="0" bIns="0" rtlCol="0" anchor="ctr"/>
-          <a:lstStyle/>
-          <a:p>
-            <a:pPr algn="ctr" indent="0" marL="0">
-              <a:buNone/>
-            </a:pPr>
-            <a:r>
-              <a:rPr lang="en-US" sz="1300" dirty="0">
-                <a:solidFill>
-                  <a:srgbClr val="ECECEF"/>
-                </a:solidFill>
-                <a:latin typeface="Malgun Gothic" pitchFamily="34" charset="0"/>
-                <a:ea typeface="Malgun Gothic" pitchFamily="34" charset="-122"/>
-                <a:cs typeface="Malgun Gothic" pitchFamily="34" charset="-120"/>
-              </a:rPr>
-              <a:t>7.8~11.7만</a:t>
-            </a:r>
-            <a:endParaRPr lang="en-US" sz="1300" dirty="0"/>
-          </a:p>
-        </p:txBody>
-      </p:sp>
-      <p:sp>
-        <p:nvSpPr>
-          <p:cNvPr id="36" name="Text 34"/>
-          <p:cNvSpPr/>
-          <p:nvPr/>
-        </p:nvSpPr>
-        <p:spPr>
-          <a:xfrm>
-            <a:off x="8961120" y="4297680"/>
-            <a:ext cx="2651760" cy="502920"/>
-          </a:xfrm>
-          <a:prstGeom prst="rect">
-            <a:avLst/>
-          </a:prstGeom>
-          <a:noFill/>
-          <a:ln/>
-        </p:spPr>
-        <p:txBody>
-          <a:bodyPr wrap="square" lIns="0" tIns="0" rIns="0" bIns="0" rtlCol="0" anchor="ctr"/>
-          <a:lstStyle/>
-          <a:p>
-            <a:pPr algn="ctr" indent="0" marL="0">
-              <a:buNone/>
-            </a:pPr>
-            <a:r>
-              <a:rPr lang="en-US" sz="1300" dirty="0">
-                <a:solidFill>
-                  <a:srgbClr val="ECECEF"/>
-                </a:solidFill>
-                <a:latin typeface="Malgun Gothic" pitchFamily="34" charset="0"/>
-                <a:ea typeface="Malgun Gothic" pitchFamily="34" charset="-122"/>
-                <a:cs typeface="Malgun Gothic" pitchFamily="34" charset="-120"/>
-              </a:rPr>
-              <a:t>-2.2 ~ 1.7만</a:t>
-            </a:r>
-            <a:endParaRPr lang="en-US" sz="1300" dirty="0"/>
-          </a:p>
-        </p:txBody>
-      </p:sp>
-      <p:sp>
-        <p:nvSpPr>
-          <p:cNvPr id="37" name="Shape 35"/>
-          <p:cNvSpPr/>
-          <p:nvPr/>
-        </p:nvSpPr>
-        <p:spPr>
-          <a:xfrm>
-            <a:off x="548640" y="4800600"/>
-            <a:ext cx="11094415" cy="502920"/>
+            <a:off x="548640" y="4553712"/>
+            <a:ext cx="11094415" cy="566928"/>
           </a:xfrm>
           <a:prstGeom prst="rect">
             <a:avLst/>
@@ -14455,14 +14334,14 @@
       </p:sp>
       <p:sp>
         <p:nvSpPr>
-          <p:cNvPr id="38" name="Shape 36"/>
-          <p:cNvSpPr/>
-          <p:nvPr/>
-        </p:nvSpPr>
-        <p:spPr>
-          <a:xfrm>
-            <a:off x="548640" y="4800600"/>
-            <a:ext cx="54864" cy="502920"/>
+          <p:cNvPr id="33" name="Shape 31"/>
+          <p:cNvSpPr/>
+          <p:nvPr/>
+        </p:nvSpPr>
+        <p:spPr>
+          <a:xfrm>
+            <a:off x="548640" y="4553712"/>
+            <a:ext cx="54864" cy="566928"/>
           </a:xfrm>
           <a:prstGeom prst="rect">
             <a:avLst/>
@@ -14475,14 +14354,14 @@
       </p:sp>
       <p:sp>
         <p:nvSpPr>
-          <p:cNvPr id="39" name="Text 37"/>
-          <p:cNvSpPr/>
-          <p:nvPr/>
-        </p:nvSpPr>
-        <p:spPr>
-          <a:xfrm>
-            <a:off x="731520" y="4800600"/>
-            <a:ext cx="3108960" cy="502920"/>
+          <p:cNvPr id="34" name="Text 32"/>
+          <p:cNvSpPr/>
+          <p:nvPr/>
+        </p:nvSpPr>
+        <p:spPr>
+          <a:xfrm>
+            <a:off x="731520" y="4553712"/>
+            <a:ext cx="3108960" cy="566928"/>
           </a:xfrm>
           <a:prstGeom prst="rect">
             <a:avLst/>
@@ -14506,7 +14385,7 @@
                 <a:ea typeface="Noto Serif KR" pitchFamily="34" charset="-122"/>
                 <a:cs typeface="Noto Serif KR" pitchFamily="34" charset="-120"/>
               </a:rPr>
-              <a:t>자평 프리미엄  ★</a:t>
+              <a:t>자평 Premium  ★</a:t>
             </a:r>
             <a:endParaRPr lang="en-US" sz="1300" dirty="0"/>
           </a:p>
@@ -14514,14 +14393,14 @@
       </p:sp>
       <p:sp>
         <p:nvSpPr>
-          <p:cNvPr id="40" name="Text 38"/>
-          <p:cNvSpPr/>
-          <p:nvPr/>
-        </p:nvSpPr>
-        <p:spPr>
-          <a:xfrm>
-            <a:off x="3931920" y="4800600"/>
-            <a:ext cx="2194560" cy="502920"/>
+          <p:cNvPr id="35" name="Text 33"/>
+          <p:cNvSpPr/>
+          <p:nvPr/>
+        </p:nvSpPr>
+        <p:spPr>
+          <a:xfrm>
+            <a:off x="3931920" y="4553712"/>
+            <a:ext cx="2194560" cy="566928"/>
           </a:xfrm>
           <a:prstGeom prst="rect">
             <a:avLst/>
@@ -14545,7 +14424,7 @@
                 <a:ea typeface="Malgun Gothic" pitchFamily="34" charset="-122"/>
                 <a:cs typeface="Malgun Gothic" pitchFamily="34" charset="-120"/>
               </a:rPr>
-              <a:t>89만</a:t>
+              <a:t>39만</a:t>
             </a:r>
             <a:endParaRPr lang="en-US" sz="1300" dirty="0"/>
           </a:p>
@@ -14553,14 +14432,14 @@
       </p:sp>
       <p:sp>
         <p:nvSpPr>
-          <p:cNvPr id="41" name="Text 39"/>
-          <p:cNvSpPr/>
-          <p:nvPr/>
-        </p:nvSpPr>
-        <p:spPr>
-          <a:xfrm>
-            <a:off x="6217920" y="4800600"/>
-            <a:ext cx="2651760" cy="502920"/>
+          <p:cNvPr id="36" name="Text 34"/>
+          <p:cNvSpPr/>
+          <p:nvPr/>
+        </p:nvSpPr>
+        <p:spPr>
+          <a:xfrm>
+            <a:off x="6217920" y="4553712"/>
+            <a:ext cx="2651760" cy="566928"/>
           </a:xfrm>
           <a:prstGeom prst="rect">
             <a:avLst/>
@@ -14584,7 +14463,7 @@
                 <a:ea typeface="Malgun Gothic" pitchFamily="34" charset="-122"/>
                 <a:cs typeface="Malgun Gothic" pitchFamily="34" charset="-120"/>
               </a:rPr>
-              <a:t>17.8~26.7만</a:t>
+              <a:t>13.6만 (35%)</a:t>
             </a:r>
             <a:endParaRPr lang="en-US" sz="1300" dirty="0"/>
           </a:p>
@@ -14592,14 +14471,14 @@
       </p:sp>
       <p:sp>
         <p:nvSpPr>
-          <p:cNvPr id="42" name="Text 40"/>
-          <p:cNvSpPr/>
-          <p:nvPr/>
-        </p:nvSpPr>
-        <p:spPr>
-          <a:xfrm>
-            <a:off x="8961120" y="4800600"/>
-            <a:ext cx="2651760" cy="502920"/>
+          <p:cNvPr id="37" name="Text 35"/>
+          <p:cNvSpPr/>
+          <p:nvPr/>
+        </p:nvSpPr>
+        <p:spPr>
+          <a:xfrm>
+            <a:off x="8961120" y="4553712"/>
+            <a:ext cx="2651760" cy="566928"/>
           </a:xfrm>
           <a:prstGeom prst="rect">
             <a:avLst/>
@@ -14623,7 +14502,7 @@
                 <a:ea typeface="Malgun Gothic" pitchFamily="34" charset="-122"/>
                 <a:cs typeface="Malgun Gothic" pitchFamily="34" charset="-120"/>
               </a:rPr>
-              <a:t>7.8 ~ 16.7만</a:t>
+              <a:t>1.6만</a:t>
             </a:r>
             <a:endParaRPr lang="en-US" sz="1300" dirty="0"/>
           </a:p>
@@ -14631,14 +14510,14 @@
       </p:sp>
       <p:sp>
         <p:nvSpPr>
-          <p:cNvPr id="43" name="Shape 41"/>
-          <p:cNvSpPr/>
-          <p:nvPr/>
-        </p:nvSpPr>
-        <p:spPr>
-          <a:xfrm>
-            <a:off x="548640" y="5303520"/>
-            <a:ext cx="11094415" cy="502920"/>
+          <p:cNvPr id="38" name="Shape 36"/>
+          <p:cNvSpPr/>
+          <p:nvPr/>
+        </p:nvSpPr>
+        <p:spPr>
+          <a:xfrm>
+            <a:off x="548640" y="5120640"/>
+            <a:ext cx="11094415" cy="566928"/>
           </a:xfrm>
           <a:prstGeom prst="rect">
             <a:avLst/>
@@ -14656,14 +14535,14 @@
       </p:sp>
       <p:sp>
         <p:nvSpPr>
-          <p:cNvPr id="44" name="Shape 42"/>
-          <p:cNvSpPr/>
-          <p:nvPr/>
-        </p:nvSpPr>
-        <p:spPr>
-          <a:xfrm>
-            <a:off x="548640" y="5303520"/>
-            <a:ext cx="54864" cy="502920"/>
+          <p:cNvPr id="39" name="Shape 37"/>
+          <p:cNvSpPr/>
+          <p:nvPr/>
+        </p:nvSpPr>
+        <p:spPr>
+          <a:xfrm>
+            <a:off x="548640" y="5120640"/>
+            <a:ext cx="54864" cy="566928"/>
           </a:xfrm>
           <a:prstGeom prst="rect">
             <a:avLst/>
@@ -14676,14 +14555,14 @@
       </p:sp>
       <p:sp>
         <p:nvSpPr>
-          <p:cNvPr id="45" name="Text 43"/>
-          <p:cNvSpPr/>
-          <p:nvPr/>
-        </p:nvSpPr>
-        <p:spPr>
-          <a:xfrm>
-            <a:off x="731520" y="5303520"/>
-            <a:ext cx="3108960" cy="502920"/>
+          <p:cNvPr id="40" name="Text 38"/>
+          <p:cNvSpPr/>
+          <p:nvPr/>
+        </p:nvSpPr>
+        <p:spPr>
+          <a:xfrm>
+            <a:off x="731520" y="5120640"/>
+            <a:ext cx="3108960" cy="566928"/>
           </a:xfrm>
           <a:prstGeom prst="rect">
             <a:avLst/>
@@ -14707,7 +14586,7 @@
                 <a:ea typeface="Noto Serif KR" pitchFamily="34" charset="-122"/>
                 <a:cs typeface="Noto Serif KR" pitchFamily="34" charset="-120"/>
               </a:rPr>
-              <a:t>자평 VIP  ★</a:t>
+              <a:t>자평 Family  ★</a:t>
             </a:r>
             <a:endParaRPr lang="en-US" sz="1300" dirty="0"/>
           </a:p>
@@ -14715,14 +14594,14 @@
       </p:sp>
       <p:sp>
         <p:nvSpPr>
-          <p:cNvPr id="46" name="Text 44"/>
-          <p:cNvSpPr/>
-          <p:nvPr/>
-        </p:nvSpPr>
-        <p:spPr>
-          <a:xfrm>
-            <a:off x="3931920" y="5303520"/>
-            <a:ext cx="2194560" cy="502920"/>
+          <p:cNvPr id="41" name="Text 39"/>
+          <p:cNvSpPr/>
+          <p:nvPr/>
+        </p:nvSpPr>
+        <p:spPr>
+          <a:xfrm>
+            <a:off x="3931920" y="5120640"/>
+            <a:ext cx="2194560" cy="566928"/>
           </a:xfrm>
           <a:prstGeom prst="rect">
             <a:avLst/>
@@ -14746,7 +14625,7 @@
                 <a:ea typeface="Malgun Gothic" pitchFamily="34" charset="-122"/>
                 <a:cs typeface="Malgun Gothic" pitchFamily="34" charset="-120"/>
               </a:rPr>
-              <a:t>180만</a:t>
+              <a:t>59만</a:t>
             </a:r>
             <a:endParaRPr lang="en-US" sz="1300" dirty="0"/>
           </a:p>
@@ -14754,14 +14633,14 @@
       </p:sp>
       <p:sp>
         <p:nvSpPr>
-          <p:cNvPr id="47" name="Text 45"/>
-          <p:cNvSpPr/>
-          <p:nvPr/>
-        </p:nvSpPr>
-        <p:spPr>
-          <a:xfrm>
-            <a:off x="6217920" y="5303520"/>
-            <a:ext cx="2651760" cy="502920"/>
+          <p:cNvPr id="42" name="Text 40"/>
+          <p:cNvSpPr/>
+          <p:nvPr/>
+        </p:nvSpPr>
+        <p:spPr>
+          <a:xfrm>
+            <a:off x="6217920" y="5120640"/>
+            <a:ext cx="2651760" cy="566928"/>
           </a:xfrm>
           <a:prstGeom prst="rect">
             <a:avLst/>
@@ -14785,7 +14664,7 @@
                 <a:ea typeface="Malgun Gothic" pitchFamily="34" charset="-122"/>
                 <a:cs typeface="Malgun Gothic" pitchFamily="34" charset="-120"/>
               </a:rPr>
-              <a:t>36~54만</a:t>
+              <a:t>23.6만 (40%)</a:t>
             </a:r>
             <a:endParaRPr lang="en-US" sz="1300" dirty="0"/>
           </a:p>
@@ -14793,14 +14672,14 @@
       </p:sp>
       <p:sp>
         <p:nvSpPr>
-          <p:cNvPr id="48" name="Text 46"/>
-          <p:cNvSpPr/>
-          <p:nvPr/>
-        </p:nvSpPr>
-        <p:spPr>
-          <a:xfrm>
-            <a:off x="8961120" y="5303520"/>
-            <a:ext cx="2651760" cy="502920"/>
+          <p:cNvPr id="43" name="Text 41"/>
+          <p:cNvSpPr/>
+          <p:nvPr/>
+        </p:nvSpPr>
+        <p:spPr>
+          <a:xfrm>
+            <a:off x="8961120" y="5120640"/>
+            <a:ext cx="2651760" cy="566928"/>
           </a:xfrm>
           <a:prstGeom prst="rect">
             <a:avLst/>
@@ -14824,7 +14703,7 @@
                 <a:ea typeface="Malgun Gothic" pitchFamily="34" charset="-122"/>
                 <a:cs typeface="Malgun Gothic" pitchFamily="34" charset="-120"/>
               </a:rPr>
-              <a:t>26 ~ 44만</a:t>
+              <a:t>10만+</a:t>
             </a:r>
             <a:endParaRPr lang="en-US" sz="1300" dirty="0"/>
           </a:p>
@@ -14832,13 +14711,13 @@
       </p:sp>
       <p:sp>
         <p:nvSpPr>
-          <p:cNvPr id="49" name="Shape 47"/>
-          <p:cNvSpPr/>
-          <p:nvPr/>
-        </p:nvSpPr>
-        <p:spPr>
-          <a:xfrm>
-            <a:off x="548640" y="5897880"/>
+          <p:cNvPr id="44" name="Shape 42"/>
+          <p:cNvSpPr/>
+          <p:nvPr/>
+        </p:nvSpPr>
+        <p:spPr>
+          <a:xfrm>
+            <a:off x="548640" y="5943600"/>
             <a:ext cx="11094415" cy="502920"/>
           </a:xfrm>
           <a:prstGeom prst="rect">
@@ -14857,13 +14736,13 @@
       </p:sp>
       <p:sp>
         <p:nvSpPr>
-          <p:cNvPr id="50" name="Text 48"/>
-          <p:cNvSpPr/>
-          <p:nvPr/>
-        </p:nvSpPr>
-        <p:spPr>
-          <a:xfrm>
-            <a:off x="548640" y="5897880"/>
+          <p:cNvPr id="45" name="Text 43"/>
+          <p:cNvSpPr/>
+          <p:nvPr/>
+        </p:nvSpPr>
+        <p:spPr>
+          <a:xfrm>
+            <a:off x="548640" y="5943600"/>
             <a:ext cx="11094415" cy="502920"/>
           </a:xfrm>
           <a:prstGeom prst="rect">
@@ -14888,7 +14767,7 @@
                 <a:ea typeface="Noto Serif KR" pitchFamily="34" charset="-122"/>
                 <a:cs typeface="Noto Serif KR" pitchFamily="34" charset="-120"/>
               </a:rPr>
-              <a:t>프리미엄·VIP가 핵심 수익원  ·  표준은 진입 미끼  ·  일반 통신·보험 채널보다 건당 마진 5~10배 두꺼움</a:t>
+              <a:t>Premium/Family가 핵심 수익원  ·  볼륨 보너스·갱신 수수료로 LTV 확보</a:t>
             </a:r>
             <a:endParaRPr lang="en-US" sz="1200" dirty="0"/>
           </a:p>
@@ -14990,7 +14869,7 @@
               <a:buNone/>
             </a:pPr>
             <a:r>
-              <a:rPr lang="en-US" sz="2800" b="1" dirty="0">
+              <a:rPr lang="en-US" sz="2600" b="1" dirty="0">
                 <a:solidFill>
                   <a:srgbClr val="ECECEF"/>
                 </a:solidFill>
@@ -14998,9 +14877,9 @@
                 <a:ea typeface="Noto Serif KR" pitchFamily="34" charset="-122"/>
                 <a:cs typeface="Noto Serif KR" pitchFamily="34" charset="-120"/>
               </a:rPr>
-              <a:t>TM 클로징 상품 — 연간 패키지 3티어</a:t>
-            </a:r>
-            <a:endParaRPr lang="en-US" sz="2800" dirty="0"/>
+              <a:t>4티어 · SKU 채널 물리적 분리</a:t>
+            </a:r>
+            <a:endParaRPr lang="en-US" sz="2600" dirty="0"/>
           </a:p>
         </p:txBody>
       </p:sp>
@@ -15057,7 +14936,7 @@
                 <a:ea typeface="Malgun Gothic" pitchFamily="34" charset="-122"/>
                 <a:cs typeface="Malgun Gothic" pitchFamily="34" charset="-120"/>
               </a:rPr>
-              <a:t>CONFIDENTIAL · PARTNERSHIP</a:t>
+              <a:t>CONFIDENTIAL · PARTNERSHIP · v2</a:t>
             </a:r>
             <a:endParaRPr lang="en-US" sz="900" dirty="0"/>
           </a:p>
@@ -15139,7 +15018,7 @@
         <p:spPr>
           <a:xfrm>
             <a:off x="548640" y="1783080"/>
-            <a:ext cx="3694176" cy="4754880"/>
+            <a:ext cx="2743200" cy="4754880"/>
           </a:xfrm>
           <a:prstGeom prst="rect">
             <a:avLst/>
@@ -15163,8 +15042,8 @@
         </p:nvSpPr>
         <p:spPr>
           <a:xfrm>
-            <a:off x="822960" y="2011680"/>
-            <a:ext cx="3145536" cy="320040"/>
+            <a:off x="731520" y="1965960"/>
+            <a:ext cx="2377440" cy="292608"/>
           </a:xfrm>
           <a:prstGeom prst="rect">
             <a:avLst/>
@@ -15180,17 +15059,17 @@
               <a:buNone/>
             </a:pPr>
             <a:r>
-              <a:rPr lang="en-US" sz="1200" b="1" spc="400" kern="0" dirty="0">
-                <a:solidFill>
-                  <a:srgbClr val="C9A961"/>
+              <a:rPr lang="en-US" sz="1000" b="1" spc="300" kern="0" dirty="0">
+                <a:solidFill>
+                  <a:srgbClr val="80828D"/>
                 </a:solidFill>
                 <a:latin typeface="Noto Serif KR" pitchFamily="34" charset="0"/>
                 <a:ea typeface="Noto Serif KR" pitchFamily="34" charset="-122"/>
                 <a:cs typeface="Noto Serif KR" pitchFamily="34" charset="-120"/>
               </a:rPr>
-              <a:t>ANNUAL · 표준</a:t>
-            </a:r>
-            <a:endParaRPr lang="en-US" sz="1200" dirty="0"/>
+              <a:t>BASIC · 자가</a:t>
+            </a:r>
+            <a:endParaRPr lang="en-US" sz="1000" dirty="0"/>
           </a:p>
         </p:txBody>
       </p:sp>
@@ -15202,8 +15081,8 @@
         </p:nvSpPr>
         <p:spPr>
           <a:xfrm>
-            <a:off x="822960" y="2350008"/>
-            <a:ext cx="3145536" cy="274320"/>
+            <a:off x="731520" y="2286000"/>
+            <a:ext cx="2377440" cy="274320"/>
           </a:xfrm>
           <a:prstGeom prst="rect">
             <a:avLst/>
@@ -15219,7 +15098,7 @@
               <a:buNone/>
             </a:pPr>
             <a:r>
-              <a:rPr lang="en-US" sz="1100" dirty="0">
+              <a:rPr lang="en-US" sz="1000" dirty="0">
                 <a:solidFill>
                   <a:srgbClr val="80828D"/>
                 </a:solidFill>
@@ -15227,9 +15106,9 @@
                 <a:ea typeface="Malgun Gothic" pitchFamily="34" charset="-122"/>
                 <a:cs typeface="Malgun Gothic" pitchFamily="34" charset="-120"/>
               </a:rPr>
-              <a:t>처음·부담스러워하는 고객</a:t>
-            </a:r>
-            <a:endParaRPr lang="en-US" sz="1100" dirty="0"/>
+              <a:t>Self-serve only · TM 비대상</a:t>
+            </a:r>
+            <a:endParaRPr lang="en-US" sz="1000" dirty="0"/>
           </a:p>
         </p:txBody>
       </p:sp>
@@ -15241,8 +15120,8 @@
         </p:nvSpPr>
         <p:spPr>
           <a:xfrm>
-            <a:off x="822960" y="2743200"/>
-            <a:ext cx="3145536" cy="731520"/>
+            <a:off x="731520" y="2697480"/>
+            <a:ext cx="2377440" cy="640080"/>
           </a:xfrm>
           <a:prstGeom prst="rect">
             <a:avLst/>
@@ -15258,31 +15137,31 @@
               <a:buNone/>
             </a:pPr>
             <a:r>
-              <a:rPr lang="en-US" sz="3600" b="1" dirty="0">
-                <a:solidFill>
-                  <a:srgbClr val="ECECEF"/>
+              <a:rPr lang="en-US" sz="2600" b="1" dirty="0">
+                <a:solidFill>
+                  <a:srgbClr val="80828D"/>
                 </a:solidFill>
                 <a:latin typeface="Noto Serif KR" pitchFamily="34" charset="0"/>
                 <a:ea typeface="Noto Serif KR" pitchFamily="34" charset="-122"/>
                 <a:cs typeface="Noto Serif KR" pitchFamily="34" charset="-120"/>
               </a:rPr>
-              <a:t>390,000</a:t>
+              <a:t>49,000</a:t>
             </a:r>
             <a:pPr indent="0" marL="0">
               <a:buNone/>
             </a:pPr>
             <a:r>
-              <a:rPr lang="en-US" sz="1300" dirty="0">
-                <a:solidFill>
-                  <a:srgbClr val="B7B8C0"/>
+              <a:rPr lang="en-US" sz="1100" dirty="0">
+                <a:solidFill>
+                  <a:srgbClr val="80828D"/>
                 </a:solidFill>
                 <a:latin typeface="Noto Serif KR" pitchFamily="34" charset="0"/>
                 <a:ea typeface="Noto Serif KR" pitchFamily="34" charset="-122"/>
                 <a:cs typeface="Noto Serif KR" pitchFamily="34" charset="-120"/>
               </a:rPr>
-              <a:t>  원/년</a:t>
-            </a:r>
-            <a:endParaRPr lang="en-US" sz="3600" dirty="0"/>
+              <a:t>원/년</a:t>
+            </a:r>
+            <a:endParaRPr lang="en-US" sz="2600" dirty="0"/>
           </a:p>
         </p:txBody>
       </p:sp>
@@ -15294,8 +15173,8 @@
         </p:nvSpPr>
         <p:spPr>
           <a:xfrm>
-            <a:off x="822960" y="3474720"/>
-            <a:ext cx="3145536" cy="274320"/>
+            <a:off x="731520" y="3383280"/>
+            <a:ext cx="2377440" cy="274320"/>
           </a:xfrm>
           <a:prstGeom prst="rect">
             <a:avLst/>
@@ -15311,7 +15190,7 @@
               <a:buNone/>
             </a:pPr>
             <a:r>
-              <a:rPr lang="en-US" sz="1100" dirty="0">
+              <a:rPr lang="en-US" sz="1000" dirty="0">
                 <a:solidFill>
                   <a:srgbClr val="80828D"/>
                 </a:solidFill>
@@ -15319,9 +15198,9 @@
                 <a:ea typeface="Malgun Gothic" pitchFamily="34" charset="-122"/>
                 <a:cs typeface="Malgun Gothic" pitchFamily="34" charset="-120"/>
               </a:rPr>
-              <a:t>월 환산 32,500원</a:t>
-            </a:r>
-            <a:endParaRPr lang="en-US" sz="1100" dirty="0"/>
+              <a:t>월 환산 4,083원</a:t>
+            </a:r>
+            <a:endParaRPr lang="en-US" sz="1000" dirty="0"/>
           </a:p>
         </p:txBody>
       </p:sp>
@@ -15333,8 +15212,8 @@
         </p:nvSpPr>
         <p:spPr>
           <a:xfrm>
-            <a:off x="822960" y="3886200"/>
-            <a:ext cx="3145536" cy="0"/>
+            <a:off x="731520" y="3794760"/>
+            <a:ext cx="2377440" cy="0"/>
           </a:xfrm>
           <a:prstGeom prst="line">
             <a:avLst/>
@@ -15356,8 +15235,8 @@
         </p:nvSpPr>
         <p:spPr>
           <a:xfrm>
-            <a:off x="822960" y="4023360"/>
-            <a:ext cx="3145536" cy="1920240"/>
+            <a:off x="731520" y="3931920"/>
+            <a:ext cx="2377440" cy="1828800"/>
           </a:xfrm>
           <a:prstGeom prst="rect">
             <a:avLst/>
@@ -15377,17 +15256,17 @@
               <a:buChar char="●"/>
             </a:pPr>
             <a:r>
-              <a:rPr lang="en-US" sz="1200" dirty="0">
-                <a:solidFill>
-                  <a:srgbClr val="ECECEF"/>
-                </a:solidFill>
-                <a:latin typeface="Malgun Gothic" pitchFamily="34" charset="0"/>
-                <a:ea typeface="Malgun Gothic" pitchFamily="34" charset="-122"/>
-                <a:cs typeface="Malgun Gothic" pitchFamily="34" charset="-120"/>
-              </a:rPr>
-              <a:t>앱 풀 기능 1년 무제한</a:t>
-            </a:r>
-            <a:endParaRPr lang="en-US" sz="1200" dirty="0"/>
+              <a:rPr lang="en-US" sz="1100" dirty="0">
+                <a:solidFill>
+                  <a:srgbClr val="80828D"/>
+                </a:solidFill>
+                <a:latin typeface="Malgun Gothic" pitchFamily="34" charset="0"/>
+                <a:ea typeface="Malgun Gothic" pitchFamily="34" charset="-122"/>
+                <a:cs typeface="Malgun Gothic" pitchFamily="34" charset="-120"/>
+              </a:rPr>
+              <a:t>AI 리포트 (공정 사용)</a:t>
+            </a:r>
+            <a:endParaRPr lang="en-US" sz="1100" dirty="0"/>
           </a:p>
           <a:p>
             <a:pPr marL="342900" indent="-342900">
@@ -15398,17 +15277,17 @@
               <a:buChar char="●"/>
             </a:pPr>
             <a:r>
-              <a:rPr lang="en-US" sz="1200" dirty="0">
-                <a:solidFill>
-                  <a:srgbClr val="ECECEF"/>
-                </a:solidFill>
-                <a:latin typeface="Malgun Gothic" pitchFamily="34" charset="0"/>
-                <a:ea typeface="Malgun Gothic" pitchFamily="34" charset="-122"/>
-                <a:cs typeface="Malgun Gothic" pitchFamily="34" charset="-120"/>
-              </a:rPr>
-              <a:t>분기 종합 PDF 리포트 4건</a:t>
-            </a:r>
-            <a:endParaRPr lang="en-US" sz="1200" dirty="0"/>
+              <a:rPr lang="en-US" sz="1100" dirty="0">
+                <a:solidFill>
+                  <a:srgbClr val="80828D"/>
+                </a:solidFill>
+                <a:latin typeface="Malgun Gothic" pitchFamily="34" charset="0"/>
+                <a:ea typeface="Malgun Gothic" pitchFamily="34" charset="-122"/>
+                <a:cs typeface="Malgun Gothic" pitchFamily="34" charset="-120"/>
+              </a:rPr>
+              <a:t>일진 알림</a:t>
+            </a:r>
+            <a:endParaRPr lang="en-US" sz="1100" dirty="0"/>
           </a:p>
           <a:p>
             <a:pPr marL="342900" indent="-342900">
@@ -15419,18 +15298,322 @@
               <a:buChar char="●"/>
             </a:pPr>
             <a:r>
-              <a:rPr lang="en-US" sz="1200" dirty="0">
-                <a:solidFill>
-                  <a:srgbClr val="ECECEF"/>
-                </a:solidFill>
-                <a:latin typeface="Malgun Gothic" pitchFamily="34" charset="0"/>
-                <a:ea typeface="Malgun Gothic" pitchFamily="34" charset="-122"/>
-                <a:cs typeface="Malgun Gothic" pitchFamily="34" charset="-120"/>
-              </a:rPr>
-              <a:t>대운 80년 인생 흐름 풀이</a:t>
-            </a:r>
-            <a:endParaRPr lang="en-US" sz="1200" dirty="0"/>
-          </a:p>
+              <a:rPr lang="en-US" sz="1100" dirty="0">
+                <a:solidFill>
+                  <a:srgbClr val="80828D"/>
+                </a:solidFill>
+                <a:latin typeface="Malgun Gothic" pitchFamily="34" charset="0"/>
+                <a:ea typeface="Malgun Gothic" pitchFamily="34" charset="-122"/>
+                <a:cs typeface="Malgun Gothic" pitchFamily="34" charset="-120"/>
+              </a:rPr>
+              <a:t>월간 요약</a:t>
+            </a:r>
+            <a:endParaRPr lang="en-US" sz="1100" dirty="0"/>
+          </a:p>
+        </p:txBody>
+      </p:sp>
+      <p:sp>
+        <p:nvSpPr>
+          <p:cNvPr id="14" name="Shape 12"/>
+          <p:cNvSpPr/>
+          <p:nvPr/>
+        </p:nvSpPr>
+        <p:spPr>
+          <a:xfrm>
+            <a:off x="731520" y="5897880"/>
+            <a:ext cx="2377440" cy="411480"/>
+          </a:xfrm>
+          <a:prstGeom prst="rect">
+            <a:avLst/>
+          </a:prstGeom>
+          <a:solidFill>
+            <a:srgbClr val="0E0F13"/>
+          </a:solidFill>
+          <a:ln w="12700">
+            <a:solidFill>
+              <a:srgbClr val="2A2E3A"/>
+            </a:solidFill>
+            <a:prstDash val="solid"/>
+          </a:ln>
+        </p:spPr>
+      </p:sp>
+      <p:sp>
+        <p:nvSpPr>
+          <p:cNvPr id="15" name="Text 13"/>
+          <p:cNvSpPr/>
+          <p:nvPr/>
+        </p:nvSpPr>
+        <p:spPr>
+          <a:xfrm>
+            <a:off x="731520" y="5897880"/>
+            <a:ext cx="2377440" cy="411480"/>
+          </a:xfrm>
+          <a:prstGeom prst="rect">
+            <a:avLst/>
+          </a:prstGeom>
+          <a:noFill/>
+          <a:ln/>
+        </p:spPr>
+        <p:txBody>
+          <a:bodyPr wrap="square" lIns="0" tIns="0" rIns="0" bIns="0" rtlCol="0" anchor="ctr"/>
+          <a:lstStyle/>
+          <a:p>
+            <a:pPr algn="ctr" indent="0" marL="0">
+              <a:buNone/>
+            </a:pPr>
+            <a:r>
+              <a:rPr lang="en-US" sz="1000" dirty="0">
+                <a:solidFill>
+                  <a:srgbClr val="80828D"/>
+                </a:solidFill>
+                <a:latin typeface="Noto Serif KR" pitchFamily="34" charset="0"/>
+                <a:ea typeface="Noto Serif KR" pitchFamily="34" charset="-122"/>
+                <a:cs typeface="Noto Serif KR" pitchFamily="34" charset="-120"/>
+              </a:rPr>
+              <a:t>TM 비대상</a:t>
+            </a:r>
+            <a:endParaRPr lang="en-US" sz="1000" dirty="0"/>
+          </a:p>
+        </p:txBody>
+      </p:sp>
+      <p:sp>
+        <p:nvSpPr>
+          <p:cNvPr id="16" name="Shape 14"/>
+          <p:cNvSpPr/>
+          <p:nvPr/>
+        </p:nvSpPr>
+        <p:spPr>
+          <a:xfrm>
+            <a:off x="3401568" y="1783080"/>
+            <a:ext cx="2743200" cy="4754880"/>
+          </a:xfrm>
+          <a:prstGeom prst="rect">
+            <a:avLst/>
+          </a:prstGeom>
+          <a:solidFill>
+            <a:srgbClr val="15171E"/>
+          </a:solidFill>
+          <a:ln w="12700">
+            <a:solidFill>
+              <a:srgbClr val="2A2E3A"/>
+            </a:solidFill>
+            <a:prstDash val="solid"/>
+          </a:ln>
+        </p:spPr>
+      </p:sp>
+      <p:sp>
+        <p:nvSpPr>
+          <p:cNvPr id="17" name="Text 15"/>
+          <p:cNvSpPr/>
+          <p:nvPr/>
+        </p:nvSpPr>
+        <p:spPr>
+          <a:xfrm>
+            <a:off x="3584448" y="1965960"/>
+            <a:ext cx="2377440" cy="292608"/>
+          </a:xfrm>
+          <a:prstGeom prst="rect">
+            <a:avLst/>
+          </a:prstGeom>
+          <a:noFill/>
+          <a:ln/>
+        </p:spPr>
+        <p:txBody>
+          <a:bodyPr wrap="square" lIns="0" tIns="0" rIns="0" bIns="0" rtlCol="0" anchor="ctr"/>
+          <a:lstStyle/>
+          <a:p>
+            <a:pPr indent="0" marL="0">
+              <a:buNone/>
+            </a:pPr>
+            <a:r>
+              <a:rPr lang="en-US" sz="1000" b="1" spc="300" kern="0" dirty="0">
+                <a:solidFill>
+                  <a:srgbClr val="80828D"/>
+                </a:solidFill>
+                <a:latin typeface="Noto Serif KR" pitchFamily="34" charset="0"/>
+                <a:ea typeface="Noto Serif KR" pitchFamily="34" charset="-122"/>
+                <a:cs typeface="Noto Serif KR" pitchFamily="34" charset="-120"/>
+              </a:rPr>
+              <a:t>STANDARD · 자가</a:t>
+            </a:r>
+            <a:endParaRPr lang="en-US" sz="1000" dirty="0"/>
+          </a:p>
+        </p:txBody>
+      </p:sp>
+      <p:sp>
+        <p:nvSpPr>
+          <p:cNvPr id="18" name="Text 16"/>
+          <p:cNvSpPr/>
+          <p:nvPr/>
+        </p:nvSpPr>
+        <p:spPr>
+          <a:xfrm>
+            <a:off x="3584448" y="2286000"/>
+            <a:ext cx="2377440" cy="274320"/>
+          </a:xfrm>
+          <a:prstGeom prst="rect">
+            <a:avLst/>
+          </a:prstGeom>
+          <a:noFill/>
+          <a:ln/>
+        </p:spPr>
+        <p:txBody>
+          <a:bodyPr wrap="square" lIns="0" tIns="0" rIns="0" bIns="0" rtlCol="0" anchor="ctr"/>
+          <a:lstStyle/>
+          <a:p>
+            <a:pPr indent="0" marL="0">
+              <a:buNone/>
+            </a:pPr>
+            <a:r>
+              <a:rPr lang="en-US" sz="1000" dirty="0">
+                <a:solidFill>
+                  <a:srgbClr val="80828D"/>
+                </a:solidFill>
+                <a:latin typeface="Malgun Gothic" pitchFamily="34" charset="0"/>
+                <a:ea typeface="Malgun Gothic" pitchFamily="34" charset="-122"/>
+                <a:cs typeface="Malgun Gothic" pitchFamily="34" charset="-120"/>
+              </a:rPr>
+              <a:t>Self-serve only · TM 비대상</a:t>
+            </a:r>
+            <a:endParaRPr lang="en-US" sz="1000" dirty="0"/>
+          </a:p>
+        </p:txBody>
+      </p:sp>
+      <p:sp>
+        <p:nvSpPr>
+          <p:cNvPr id="19" name="Text 17"/>
+          <p:cNvSpPr/>
+          <p:nvPr/>
+        </p:nvSpPr>
+        <p:spPr>
+          <a:xfrm>
+            <a:off x="3584448" y="2697480"/>
+            <a:ext cx="2377440" cy="640080"/>
+          </a:xfrm>
+          <a:prstGeom prst="rect">
+            <a:avLst/>
+          </a:prstGeom>
+          <a:noFill/>
+          <a:ln/>
+        </p:spPr>
+        <p:txBody>
+          <a:bodyPr wrap="square" lIns="0" tIns="0" rIns="0" bIns="0" rtlCol="0" anchor="ctr"/>
+          <a:lstStyle/>
+          <a:p>
+            <a:pPr indent="0" marL="0">
+              <a:buNone/>
+            </a:pPr>
+            <a:r>
+              <a:rPr lang="en-US" sz="2600" b="1" dirty="0">
+                <a:solidFill>
+                  <a:srgbClr val="80828D"/>
+                </a:solidFill>
+                <a:latin typeface="Noto Serif KR" pitchFamily="34" charset="0"/>
+                <a:ea typeface="Noto Serif KR" pitchFamily="34" charset="-122"/>
+                <a:cs typeface="Noto Serif KR" pitchFamily="34" charset="-120"/>
+              </a:rPr>
+              <a:t>149,000</a:t>
+            </a:r>
+            <a:pPr indent="0" marL="0">
+              <a:buNone/>
+            </a:pPr>
+            <a:r>
+              <a:rPr lang="en-US" sz="1100" dirty="0">
+                <a:solidFill>
+                  <a:srgbClr val="80828D"/>
+                </a:solidFill>
+                <a:latin typeface="Noto Serif KR" pitchFamily="34" charset="0"/>
+                <a:ea typeface="Noto Serif KR" pitchFamily="34" charset="-122"/>
+                <a:cs typeface="Noto Serif KR" pitchFamily="34" charset="-120"/>
+              </a:rPr>
+              <a:t>원/년</a:t>
+            </a:r>
+            <a:endParaRPr lang="en-US" sz="2600" dirty="0"/>
+          </a:p>
+        </p:txBody>
+      </p:sp>
+      <p:sp>
+        <p:nvSpPr>
+          <p:cNvPr id="20" name="Text 18"/>
+          <p:cNvSpPr/>
+          <p:nvPr/>
+        </p:nvSpPr>
+        <p:spPr>
+          <a:xfrm>
+            <a:off x="3584448" y="3383280"/>
+            <a:ext cx="2377440" cy="274320"/>
+          </a:xfrm>
+          <a:prstGeom prst="rect">
+            <a:avLst/>
+          </a:prstGeom>
+          <a:noFill/>
+          <a:ln/>
+        </p:spPr>
+        <p:txBody>
+          <a:bodyPr wrap="square" lIns="0" tIns="0" rIns="0" bIns="0" rtlCol="0" anchor="ctr"/>
+          <a:lstStyle/>
+          <a:p>
+            <a:pPr indent="0" marL="0">
+              <a:buNone/>
+            </a:pPr>
+            <a:r>
+              <a:rPr lang="en-US" sz="1000" dirty="0">
+                <a:solidFill>
+                  <a:srgbClr val="80828D"/>
+                </a:solidFill>
+                <a:latin typeface="Malgun Gothic" pitchFamily="34" charset="0"/>
+                <a:ea typeface="Malgun Gothic" pitchFamily="34" charset="-122"/>
+                <a:cs typeface="Malgun Gothic" pitchFamily="34" charset="-120"/>
+              </a:rPr>
+              <a:t>월 환산 12,416원</a:t>
+            </a:r>
+            <a:endParaRPr lang="en-US" sz="1000" dirty="0"/>
+          </a:p>
+        </p:txBody>
+      </p:sp>
+      <p:sp>
+        <p:nvSpPr>
+          <p:cNvPr id="21" name="Shape 19"/>
+          <p:cNvSpPr/>
+          <p:nvPr/>
+        </p:nvSpPr>
+        <p:spPr>
+          <a:xfrm>
+            <a:off x="3584448" y="3794760"/>
+            <a:ext cx="2377440" cy="0"/>
+          </a:xfrm>
+          <a:prstGeom prst="line">
+            <a:avLst/>
+          </a:prstGeom>
+          <a:noFill/>
+          <a:ln w="6350">
+            <a:solidFill>
+              <a:srgbClr val="2A2E3A"/>
+            </a:solidFill>
+            <a:prstDash val="solid"/>
+          </a:ln>
+        </p:spPr>
+      </p:sp>
+      <p:sp>
+        <p:nvSpPr>
+          <p:cNvPr id="22" name="Text 20"/>
+          <p:cNvSpPr/>
+          <p:nvPr/>
+        </p:nvSpPr>
+        <p:spPr>
+          <a:xfrm>
+            <a:off x="3584448" y="3931920"/>
+            <a:ext cx="2377440" cy="1828800"/>
+          </a:xfrm>
+          <a:prstGeom prst="rect">
+            <a:avLst/>
+          </a:prstGeom>
+          <a:noFill/>
+          <a:ln/>
+        </p:spPr>
+        <p:txBody>
+          <a:bodyPr wrap="square" lIns="0" tIns="0" rIns="0" bIns="0" rtlCol="0" anchor="ctr"/>
+          <a:lstStyle/>
           <a:p>
             <a:pPr marL="342900" indent="-342900">
               <a:spcAft>
@@ -15440,40 +15623,82 @@
               <a:buChar char="●"/>
             </a:pPr>
             <a:r>
-              <a:rPr lang="en-US" sz="1200" dirty="0">
-                <a:solidFill>
-                  <a:srgbClr val="ECECEF"/>
-                </a:solidFill>
-                <a:latin typeface="Malgun Gothic" pitchFamily="34" charset="0"/>
-                <a:ea typeface="Malgun Gothic" pitchFamily="34" charset="-122"/>
-                <a:cs typeface="Malgun Gothic" pitchFamily="34" charset="-120"/>
-              </a:rPr>
-              <a:t>대화·리포트 영구 보관</a:t>
-            </a:r>
-            <a:endParaRPr lang="en-US" sz="1200" dirty="0"/>
-          </a:p>
-        </p:txBody>
-      </p:sp>
-      <p:sp>
-        <p:nvSpPr>
-          <p:cNvPr id="14" name="Shape 12"/>
-          <p:cNvSpPr/>
-          <p:nvPr/>
-        </p:nvSpPr>
-        <p:spPr>
-          <a:xfrm>
-            <a:off x="822960" y="5897880"/>
-            <a:ext cx="3145536" cy="411480"/>
+              <a:rPr lang="en-US" sz="1100" dirty="0">
+                <a:solidFill>
+                  <a:srgbClr val="80828D"/>
+                </a:solidFill>
+                <a:latin typeface="Malgun Gothic" pitchFamily="34" charset="0"/>
+                <a:ea typeface="Malgun Gothic" pitchFamily="34" charset="-122"/>
+                <a:cs typeface="Malgun Gothic" pitchFamily="34" charset="-120"/>
+              </a:rPr>
+              <a:t>Basic 전체 포함</a:t>
+            </a:r>
+            <a:endParaRPr lang="en-US" sz="1100" dirty="0"/>
+          </a:p>
+          <a:p>
+            <a:pPr marL="342900" indent="-342900">
+              <a:spcAft>
+                <a:spcPts val="600"/>
+              </a:spcAft>
+              <a:buSzPct val="100000"/>
+              <a:buChar char="●"/>
+            </a:pPr>
+            <a:r>
+              <a:rPr lang="en-US" sz="1100" dirty="0">
+                <a:solidFill>
+                  <a:srgbClr val="80828D"/>
+                </a:solidFill>
+                <a:latin typeface="Malgun Gothic" pitchFamily="34" charset="0"/>
+                <a:ea typeface="Malgun Gothic" pitchFamily="34" charset="-122"/>
+                <a:cs typeface="Malgun Gothic" pitchFamily="34" charset="-120"/>
+              </a:rPr>
+              <a:t>결정 도우미 무제한</a:t>
+            </a:r>
+            <a:endParaRPr lang="en-US" sz="1100" dirty="0"/>
+          </a:p>
+          <a:p>
+            <a:pPr marL="342900" indent="-342900">
+              <a:spcAft>
+                <a:spcPts val="600"/>
+              </a:spcAft>
+              <a:buSzPct val="100000"/>
+              <a:buChar char="●"/>
+            </a:pPr>
+            <a:r>
+              <a:rPr lang="en-US" sz="1100" dirty="0">
+                <a:solidFill>
+                  <a:srgbClr val="80828D"/>
+                </a:solidFill>
+                <a:latin typeface="Malgun Gothic" pitchFamily="34" charset="0"/>
+                <a:ea typeface="Malgun Gothic" pitchFamily="34" charset="-122"/>
+                <a:cs typeface="Malgun Gothic" pitchFamily="34" charset="-120"/>
+              </a:rPr>
+              <a:t>상세 통변·궁합 5건</a:t>
+            </a:r>
+            <a:endParaRPr lang="en-US" sz="1100" dirty="0"/>
+          </a:p>
+        </p:txBody>
+      </p:sp>
+      <p:sp>
+        <p:nvSpPr>
+          <p:cNvPr id="23" name="Shape 21"/>
+          <p:cNvSpPr/>
+          <p:nvPr/>
+        </p:nvSpPr>
+        <p:spPr>
+          <a:xfrm>
+            <a:off x="3584448" y="5897880"/>
+            <a:ext cx="2377440" cy="411480"/>
           </a:xfrm>
           <a:prstGeom prst="rect">
             <a:avLst/>
           </a:prstGeom>
           <a:solidFill>
-            <a:srgbClr val="1B1E27"/>
+            <a:srgbClr val="0E0F13"/>
           </a:solidFill>
           <a:ln w="12700">
             <a:solidFill>
-              <a:srgbClr val="8C7838"/>
+              <a:srgbClr val="2A2E3A"/>
             </a:solidFill>
             <a:prstDash val="solid"/>
           </a:ln>
@@ -15481,14 +15706,14 @@
       </p:sp>
       <p:sp>
         <p:nvSpPr>
-          <p:cNvPr id="15" name="Text 13"/>
-          <p:cNvSpPr/>
-          <p:nvPr/>
-        </p:nvSpPr>
-        <p:spPr>
-          <a:xfrm>
-            <a:off x="822960" y="5897880"/>
-            <a:ext cx="3145536" cy="411480"/>
+          <p:cNvPr id="24" name="Text 22"/>
+          <p:cNvSpPr/>
+          <p:nvPr/>
+        </p:nvSpPr>
+        <p:spPr>
+          <a:xfrm>
+            <a:off x="3584448" y="5897880"/>
+            <a:ext cx="2377440" cy="411480"/>
           </a:xfrm>
           <a:prstGeom prst="rect">
             <a:avLst/>
@@ -15504,30 +15729,30 @@
               <a:buNone/>
             </a:pPr>
             <a:r>
-              <a:rPr lang="en-US" sz="1200" b="1" dirty="0">
-                <a:solidFill>
-                  <a:srgbClr val="C9A961"/>
+              <a:rPr lang="en-US" sz="1000" dirty="0">
+                <a:solidFill>
+                  <a:srgbClr val="80828D"/>
                 </a:solidFill>
                 <a:latin typeface="Noto Serif KR" pitchFamily="34" charset="0"/>
                 <a:ea typeface="Noto Serif KR" pitchFamily="34" charset="-122"/>
                 <a:cs typeface="Noto Serif KR" pitchFamily="34" charset="-120"/>
               </a:rPr>
-              <a:t>TM 수수료 (20%): 78,000원</a:t>
-            </a:r>
-            <a:endParaRPr lang="en-US" sz="1200" dirty="0"/>
-          </a:p>
-        </p:txBody>
-      </p:sp>
-      <p:sp>
-        <p:nvSpPr>
-          <p:cNvPr id="16" name="Shape 14"/>
-          <p:cNvSpPr/>
-          <p:nvPr/>
-        </p:nvSpPr>
-        <p:spPr>
-          <a:xfrm>
-            <a:off x="4379976" y="1783080"/>
-            <a:ext cx="3694176" cy="4754880"/>
+              <a:t>TM 비대상</a:t>
+            </a:r>
+            <a:endParaRPr lang="en-US" sz="1000" dirty="0"/>
+          </a:p>
+        </p:txBody>
+      </p:sp>
+      <p:sp>
+        <p:nvSpPr>
+          <p:cNvPr id="25" name="Shape 23"/>
+          <p:cNvSpPr/>
+          <p:nvPr/>
+        </p:nvSpPr>
+        <p:spPr>
+          <a:xfrm>
+            <a:off x="6254496" y="1783080"/>
+            <a:ext cx="2743200" cy="4754880"/>
           </a:xfrm>
           <a:prstGeom prst="rect">
             <a:avLst/>
@@ -15545,14 +15770,14 @@
       </p:sp>
       <p:sp>
         <p:nvSpPr>
-          <p:cNvPr id="17" name="Text 15"/>
-          <p:cNvSpPr/>
-          <p:nvPr/>
-        </p:nvSpPr>
-        <p:spPr>
-          <a:xfrm>
-            <a:off x="4654296" y="2011680"/>
-            <a:ext cx="3145536" cy="320040"/>
+          <p:cNvPr id="26" name="Text 24"/>
+          <p:cNvSpPr/>
+          <p:nvPr/>
+        </p:nvSpPr>
+        <p:spPr>
+          <a:xfrm>
+            <a:off x="6437376" y="1965960"/>
+            <a:ext cx="2377440" cy="292608"/>
           </a:xfrm>
           <a:prstGeom prst="rect">
             <a:avLst/>
@@ -15568,7 +15793,7 @@
               <a:buNone/>
             </a:pPr>
             <a:r>
-              <a:rPr lang="en-US" sz="1200" b="1" spc="400" kern="0" dirty="0">
+              <a:rPr lang="en-US" sz="1000" b="1" spc="300" kern="0" dirty="0">
                 <a:solidFill>
                   <a:srgbClr val="C9A961"/>
                 </a:solidFill>
@@ -15576,22 +15801,22 @@
                 <a:ea typeface="Noto Serif KR" pitchFamily="34" charset="-122"/>
                 <a:cs typeface="Noto Serif KR" pitchFamily="34" charset="-120"/>
               </a:rPr>
-              <a:t>ANNUAL · 프리미엄 ★</a:t>
-            </a:r>
-            <a:endParaRPr lang="en-US" sz="1200" dirty="0"/>
-          </a:p>
-        </p:txBody>
-      </p:sp>
-      <p:sp>
-        <p:nvSpPr>
-          <p:cNvPr id="18" name="Text 16"/>
-          <p:cNvSpPr/>
-          <p:nvPr/>
-        </p:nvSpPr>
-        <p:spPr>
-          <a:xfrm>
-            <a:off x="4654296" y="2350008"/>
-            <a:ext cx="3145536" cy="274320"/>
+              <a:t>PREMIUM (1:1) ★</a:t>
+            </a:r>
+            <a:endParaRPr lang="en-US" sz="1000" dirty="0"/>
+          </a:p>
+        </p:txBody>
+      </p:sp>
+      <p:sp>
+        <p:nvSpPr>
+          <p:cNvPr id="27" name="Text 25"/>
+          <p:cNvSpPr/>
+          <p:nvPr/>
+        </p:nvSpPr>
+        <p:spPr>
+          <a:xfrm>
+            <a:off x="6437376" y="2286000"/>
+            <a:ext cx="2377440" cy="274320"/>
           </a:xfrm>
           <a:prstGeom prst="rect">
             <a:avLst/>
@@ -15607,30 +15832,30 @@
               <a:buNone/>
             </a:pPr>
             <a:r>
-              <a:rPr lang="en-US" sz="1100" dirty="0">
-                <a:solidFill>
-                  <a:srgbClr val="80828D"/>
-                </a:solidFill>
-                <a:latin typeface="Malgun Gothic" pitchFamily="34" charset="0"/>
-                <a:ea typeface="Malgun Gothic" pitchFamily="34" charset="-122"/>
-                <a:cs typeface="Malgun Gothic" pitchFamily="34" charset="-120"/>
-              </a:rPr>
-              <a:t>결정 앞에 선 고객</a:t>
-            </a:r>
-            <a:endParaRPr lang="en-US" sz="1100" dirty="0"/>
-          </a:p>
-        </p:txBody>
-      </p:sp>
-      <p:sp>
-        <p:nvSpPr>
-          <p:cNvPr id="19" name="Text 17"/>
-          <p:cNvSpPr/>
-          <p:nvPr/>
-        </p:nvSpPr>
-        <p:spPr>
-          <a:xfrm>
-            <a:off x="4654296" y="2743200"/>
-            <a:ext cx="3145536" cy="731520"/>
+              <a:rPr lang="en-US" sz="1000" dirty="0">
+                <a:solidFill>
+                  <a:srgbClr val="B7B8C0"/>
+                </a:solidFill>
+                <a:latin typeface="Malgun Gothic" pitchFamily="34" charset="0"/>
+                <a:ea typeface="Malgun Gothic" pitchFamily="34" charset="-122"/>
+                <a:cs typeface="Malgun Gothic" pitchFamily="34" charset="-120"/>
+              </a:rPr>
+              <a:t>TM 핵심 클로징</a:t>
+            </a:r>
+            <a:endParaRPr lang="en-US" sz="1000" dirty="0"/>
+          </a:p>
+        </p:txBody>
+      </p:sp>
+      <p:sp>
+        <p:nvSpPr>
+          <p:cNvPr id="28" name="Text 26"/>
+          <p:cNvSpPr/>
+          <p:nvPr/>
+        </p:nvSpPr>
+        <p:spPr>
+          <a:xfrm>
+            <a:off x="6437376" y="2697480"/>
+            <a:ext cx="2377440" cy="640080"/>
           </a:xfrm>
           <a:prstGeom prst="rect">
             <a:avLst/>
@@ -15646,7 +15871,7 @@
               <a:buNone/>
             </a:pPr>
             <a:r>
-              <a:rPr lang="en-US" sz="3600" b="1" dirty="0">
+              <a:rPr lang="en-US" sz="2600" b="1" dirty="0">
                 <a:solidFill>
                   <a:srgbClr val="ECECEF"/>
                 </a:solidFill>
@@ -15654,13 +15879,13 @@
                 <a:ea typeface="Noto Serif KR" pitchFamily="34" charset="-122"/>
                 <a:cs typeface="Noto Serif KR" pitchFamily="34" charset="-120"/>
               </a:rPr>
-              <a:t>890,000</a:t>
+              <a:t>390,000</a:t>
             </a:r>
             <a:pPr indent="0" marL="0">
               <a:buNone/>
             </a:pPr>
             <a:r>
-              <a:rPr lang="en-US" sz="1300" dirty="0">
+              <a:rPr lang="en-US" sz="1100" dirty="0">
                 <a:solidFill>
                   <a:srgbClr val="B7B8C0"/>
                 </a:solidFill>
@@ -15668,22 +15893,22 @@
                 <a:ea typeface="Noto Serif KR" pitchFamily="34" charset="-122"/>
                 <a:cs typeface="Noto Serif KR" pitchFamily="34" charset="-120"/>
               </a:rPr>
-              <a:t>  원/년</a:t>
-            </a:r>
-            <a:endParaRPr lang="en-US" sz="3600" dirty="0"/>
-          </a:p>
-        </p:txBody>
-      </p:sp>
-      <p:sp>
-        <p:nvSpPr>
-          <p:cNvPr id="20" name="Text 18"/>
-          <p:cNvSpPr/>
-          <p:nvPr/>
-        </p:nvSpPr>
-        <p:spPr>
-          <a:xfrm>
-            <a:off x="4654296" y="3474720"/>
-            <a:ext cx="3145536" cy="274320"/>
+              <a:t>원/년</a:t>
+            </a:r>
+            <a:endParaRPr lang="en-US" sz="2600" dirty="0"/>
+          </a:p>
+        </p:txBody>
+      </p:sp>
+      <p:sp>
+        <p:nvSpPr>
+          <p:cNvPr id="29" name="Text 27"/>
+          <p:cNvSpPr/>
+          <p:nvPr/>
+        </p:nvSpPr>
+        <p:spPr>
+          <a:xfrm>
+            <a:off x="6437376" y="3383280"/>
+            <a:ext cx="2377440" cy="274320"/>
           </a:xfrm>
           <a:prstGeom prst="rect">
             <a:avLst/>
@@ -15699,7 +15924,7 @@
               <a:buNone/>
             </a:pPr>
             <a:r>
-              <a:rPr lang="en-US" sz="1100" dirty="0">
+              <a:rPr lang="en-US" sz="1000" dirty="0">
                 <a:solidFill>
                   <a:srgbClr val="80828D"/>
                 </a:solidFill>
@@ -15707,22 +15932,22 @@
                 <a:ea typeface="Malgun Gothic" pitchFamily="34" charset="-122"/>
                 <a:cs typeface="Malgun Gothic" pitchFamily="34" charset="-120"/>
               </a:rPr>
-              <a:t>월 환산 74,000원</a:t>
-            </a:r>
-            <a:endParaRPr lang="en-US" sz="1100" dirty="0"/>
-          </a:p>
-        </p:txBody>
-      </p:sp>
-      <p:sp>
-        <p:nvSpPr>
-          <p:cNvPr id="21" name="Shape 19"/>
-          <p:cNvSpPr/>
-          <p:nvPr/>
-        </p:nvSpPr>
-        <p:spPr>
-          <a:xfrm>
-            <a:off x="4654296" y="3886200"/>
-            <a:ext cx="3145536" cy="0"/>
+              <a:t>월 환산 32,500원</a:t>
+            </a:r>
+            <a:endParaRPr lang="en-US" sz="1000" dirty="0"/>
+          </a:p>
+        </p:txBody>
+      </p:sp>
+      <p:sp>
+        <p:nvSpPr>
+          <p:cNvPr id="30" name="Shape 28"/>
+          <p:cNvSpPr/>
+          <p:nvPr/>
+        </p:nvSpPr>
+        <p:spPr>
+          <a:xfrm>
+            <a:off x="6437376" y="3794760"/>
+            <a:ext cx="2377440" cy="0"/>
           </a:xfrm>
           <a:prstGeom prst="line">
             <a:avLst/>
@@ -15738,14 +15963,14 @@
       </p:sp>
       <p:sp>
         <p:nvSpPr>
-          <p:cNvPr id="22" name="Text 20"/>
-          <p:cNvSpPr/>
-          <p:nvPr/>
-        </p:nvSpPr>
-        <p:spPr>
-          <a:xfrm>
-            <a:off x="4654296" y="4023360"/>
-            <a:ext cx="3145536" cy="1920240"/>
+          <p:cNvPr id="31" name="Text 29"/>
+          <p:cNvSpPr/>
+          <p:nvPr/>
+        </p:nvSpPr>
+        <p:spPr>
+          <a:xfrm>
+            <a:off x="6437376" y="3931920"/>
+            <a:ext cx="2377440" cy="1828800"/>
           </a:xfrm>
           <a:prstGeom prst="rect">
             <a:avLst/>
@@ -15765,7 +15990,7 @@
               <a:buChar char="●"/>
             </a:pPr>
             <a:r>
-              <a:rPr lang="en-US" sz="1200" dirty="0">
+              <a:rPr lang="en-US" sz="1100" dirty="0">
                 <a:solidFill>
                   <a:srgbClr val="ECECEF"/>
                 </a:solidFill>
@@ -15773,9 +15998,9 @@
                 <a:ea typeface="Malgun Gothic" pitchFamily="34" charset="-122"/>
                 <a:cs typeface="Malgun Gothic" pitchFamily="34" charset="-120"/>
               </a:rPr>
-              <a:t>표준 패키지 전체 포함</a:t>
-            </a:r>
-            <a:endParaRPr lang="en-US" sz="1200" dirty="0"/>
+              <a:t>Standard 전체 포함</a:t>
+            </a:r>
+            <a:endParaRPr lang="en-US" sz="1100" dirty="0"/>
           </a:p>
           <a:p>
             <a:pPr marL="342900" indent="-342900">
@@ -15786,7 +16011,7 @@
               <a:buChar char="●"/>
             </a:pPr>
             <a:r>
-              <a:rPr lang="en-US" sz="1200" dirty="0">
+              <a:rPr lang="en-US" sz="1100" dirty="0">
                 <a:solidFill>
                   <a:srgbClr val="ECECEF"/>
                 </a:solidFill>
@@ -15794,9 +16019,9 @@
                 <a:ea typeface="Malgun Gothic" pitchFamily="34" charset="-122"/>
                 <a:cs typeface="Malgun Gothic" pitchFamily="34" charset="-120"/>
               </a:rPr>
-              <a:t>자문위원 1:1 전화 연 2회 (30분)</a:t>
-            </a:r>
-            <a:endParaRPr lang="en-US" sz="1200" dirty="0"/>
+              <a:t>자문위원 1:1 연 2회</a:t>
+            </a:r>
+            <a:endParaRPr lang="en-US" sz="1100" dirty="0"/>
           </a:p>
           <a:p>
             <a:pPr marL="342900" indent="-342900">
@@ -15807,7 +16032,7 @@
               <a:buChar char="●"/>
             </a:pPr>
             <a:r>
-              <a:rPr lang="en-US" sz="1200" dirty="0">
+              <a:rPr lang="en-US" sz="1100" dirty="0">
                 <a:solidFill>
                   <a:srgbClr val="ECECEF"/>
                 </a:solidFill>
@@ -15815,43 +16040,22 @@
                 <a:ea typeface="Malgun Gothic" pitchFamily="34" charset="-122"/>
                 <a:cs typeface="Malgun Gothic" pitchFamily="34" charset="-120"/>
               </a:rPr>
-              <a:t>주요 결정 학파 교차 검토</a:t>
-            </a:r>
-            <a:endParaRPr lang="en-US" sz="1200" dirty="0"/>
-          </a:p>
-          <a:p>
-            <a:pPr marL="342900" indent="-342900">
-              <a:spcAft>
-                <a:spcPts val="600"/>
-              </a:spcAft>
-              <a:buSzPct val="100000"/>
-              <a:buChar char="●"/>
-            </a:pPr>
-            <a:r>
-              <a:rPr lang="en-US" sz="1200" dirty="0">
-                <a:solidFill>
-                  <a:srgbClr val="ECECEF"/>
-                </a:solidFill>
-                <a:latin typeface="Malgun Gothic" pitchFamily="34" charset="0"/>
-                <a:ea typeface="Malgun Gothic" pitchFamily="34" charset="-122"/>
-                <a:cs typeface="Malgun Gothic" pitchFamily="34" charset="-120"/>
-              </a:rPr>
-              <a:t>분기 보고서 인쇄본 발송</a:t>
-            </a:r>
-            <a:endParaRPr lang="en-US" sz="1200" dirty="0"/>
-          </a:p>
-        </p:txBody>
-      </p:sp>
-      <p:sp>
-        <p:nvSpPr>
-          <p:cNvPr id="23" name="Shape 21"/>
-          <p:cNvSpPr/>
-          <p:nvPr/>
-        </p:nvSpPr>
-        <p:spPr>
-          <a:xfrm>
-            <a:off x="4654296" y="5897880"/>
-            <a:ext cx="3145536" cy="411480"/>
+              <a:t>학파 교차 검토</a:t>
+            </a:r>
+            <a:endParaRPr lang="en-US" sz="1100" dirty="0"/>
+          </a:p>
+        </p:txBody>
+      </p:sp>
+      <p:sp>
+        <p:nvSpPr>
+          <p:cNvPr id="32" name="Shape 30"/>
+          <p:cNvSpPr/>
+          <p:nvPr/>
+        </p:nvSpPr>
+        <p:spPr>
+          <a:xfrm>
+            <a:off x="6437376" y="5897880"/>
+            <a:ext cx="2377440" cy="411480"/>
           </a:xfrm>
           <a:prstGeom prst="rect">
             <a:avLst/>
@@ -15869,14 +16073,14 @@
       </p:sp>
       <p:sp>
         <p:nvSpPr>
-          <p:cNvPr id="24" name="Text 22"/>
-          <p:cNvSpPr/>
-          <p:nvPr/>
-        </p:nvSpPr>
-        <p:spPr>
-          <a:xfrm>
-            <a:off x="4654296" y="5897880"/>
-            <a:ext cx="3145536" cy="411480"/>
+          <p:cNvPr id="33" name="Text 31"/>
+          <p:cNvSpPr/>
+          <p:nvPr/>
+        </p:nvSpPr>
+        <p:spPr>
+          <a:xfrm>
+            <a:off x="6437376" y="5897880"/>
+            <a:ext cx="2377440" cy="411480"/>
           </a:xfrm>
           <a:prstGeom prst="rect">
             <a:avLst/>
@@ -15892,7 +16096,7 @@
               <a:buNone/>
             </a:pPr>
             <a:r>
-              <a:rPr lang="en-US" sz="1200" b="1" dirty="0">
+              <a:rPr lang="en-US" sz="1000" b="1" dirty="0">
                 <a:solidFill>
                   <a:srgbClr val="C9A961"/>
                 </a:solidFill>
@@ -15900,32 +16104,32 @@
                 <a:ea typeface="Noto Serif KR" pitchFamily="34" charset="-122"/>
                 <a:cs typeface="Noto Serif KR" pitchFamily="34" charset="-120"/>
               </a:rPr>
-              <a:t>TM 수수료 (25%): 222,500원</a:t>
-            </a:r>
-            <a:endParaRPr lang="en-US" sz="1200" dirty="0"/>
-          </a:p>
-        </p:txBody>
-      </p:sp>
-      <p:sp>
-        <p:nvSpPr>
-          <p:cNvPr id="25" name="Shape 23"/>
-          <p:cNvSpPr/>
-          <p:nvPr/>
-        </p:nvSpPr>
-        <p:spPr>
-          <a:xfrm>
-            <a:off x="8211312" y="1783080"/>
-            <a:ext cx="3694176" cy="4754880"/>
+              <a:t>TM 수수료 (35%): 136,500원</a:t>
+            </a:r>
+            <a:endParaRPr lang="en-US" sz="1000" dirty="0"/>
+          </a:p>
+        </p:txBody>
+      </p:sp>
+      <p:sp>
+        <p:nvSpPr>
+          <p:cNvPr id="34" name="Shape 32"/>
+          <p:cNvSpPr/>
+          <p:nvPr/>
+        </p:nvSpPr>
+        <p:spPr>
+          <a:xfrm>
+            <a:off x="9107424" y="1783080"/>
+            <a:ext cx="2743200" cy="4754880"/>
           </a:xfrm>
           <a:prstGeom prst="rect">
             <a:avLst/>
           </a:prstGeom>
           <a:solidFill>
-            <a:srgbClr val="15171E"/>
+            <a:srgbClr val="1B1E27"/>
           </a:solidFill>
-          <a:ln w="12700">
+          <a:ln w="25400">
             <a:solidFill>
-              <a:srgbClr val="2A2E3A"/>
+              <a:srgbClr val="C9A961"/>
             </a:solidFill>
             <a:prstDash val="solid"/>
           </a:ln>
@@ -15933,14 +16137,14 @@
       </p:sp>
       <p:sp>
         <p:nvSpPr>
-          <p:cNvPr id="26" name="Text 24"/>
-          <p:cNvSpPr/>
-          <p:nvPr/>
-        </p:nvSpPr>
-        <p:spPr>
-          <a:xfrm>
-            <a:off x="8485632" y="2011680"/>
-            <a:ext cx="3145536" cy="320040"/>
+          <p:cNvPr id="35" name="Text 33"/>
+          <p:cNvSpPr/>
+          <p:nvPr/>
+        </p:nvSpPr>
+        <p:spPr>
+          <a:xfrm>
+            <a:off x="9290304" y="1965960"/>
+            <a:ext cx="2377440" cy="292608"/>
           </a:xfrm>
           <a:prstGeom prst="rect">
             <a:avLst/>
@@ -15956,7 +16160,7 @@
               <a:buNone/>
             </a:pPr>
             <a:r>
-              <a:rPr lang="en-US" sz="1200" b="1" spc="400" kern="0" dirty="0">
+              <a:rPr lang="en-US" sz="1000" b="1" spc="300" kern="0" dirty="0">
                 <a:solidFill>
                   <a:srgbClr val="C9A961"/>
                 </a:solidFill>
@@ -15964,22 +16168,22 @@
                 <a:ea typeface="Noto Serif KR" pitchFamily="34" charset="-122"/>
                 <a:cs typeface="Noto Serif KR" pitchFamily="34" charset="-120"/>
               </a:rPr>
-              <a:t>ANNUAL · VIP</a:t>
-            </a:r>
-            <a:endParaRPr lang="en-US" sz="1200" dirty="0"/>
-          </a:p>
-        </p:txBody>
-      </p:sp>
-      <p:sp>
-        <p:nvSpPr>
-          <p:cNvPr id="27" name="Text 25"/>
-          <p:cNvSpPr/>
-          <p:nvPr/>
-        </p:nvSpPr>
-        <p:spPr>
-          <a:xfrm>
-            <a:off x="8485632" y="2350008"/>
-            <a:ext cx="3145536" cy="274320"/>
+              <a:t>FAMILY · TM 우선 ★</a:t>
+            </a:r>
+            <a:endParaRPr lang="en-US" sz="1000" dirty="0"/>
+          </a:p>
+        </p:txBody>
+      </p:sp>
+      <p:sp>
+        <p:nvSpPr>
+          <p:cNvPr id="36" name="Text 34"/>
+          <p:cNvSpPr/>
+          <p:nvPr/>
+        </p:nvSpPr>
+        <p:spPr>
+          <a:xfrm>
+            <a:off x="9290304" y="2286000"/>
+            <a:ext cx="2377440" cy="274320"/>
           </a:xfrm>
           <a:prstGeom prst="rect">
             <a:avLst/>
@@ -15995,30 +16199,30 @@
               <a:buNone/>
             </a:pPr>
             <a:r>
-              <a:rPr lang="en-US" sz="1100" dirty="0">
-                <a:solidFill>
-                  <a:srgbClr val="80828D"/>
-                </a:solidFill>
-                <a:latin typeface="Malgun Gothic" pitchFamily="34" charset="0"/>
-                <a:ea typeface="Malgun Gothic" pitchFamily="34" charset="-122"/>
-                <a:cs typeface="Malgun Gothic" pitchFamily="34" charset="-120"/>
-              </a:rPr>
-              <a:t>가족 단위·반복 의사결정</a:t>
-            </a:r>
-            <a:endParaRPr lang="en-US" sz="1100" dirty="0"/>
-          </a:p>
-        </p:txBody>
-      </p:sp>
-      <p:sp>
-        <p:nvSpPr>
-          <p:cNvPr id="28" name="Text 26"/>
-          <p:cNvSpPr/>
-          <p:nvPr/>
-        </p:nvSpPr>
-        <p:spPr>
-          <a:xfrm>
-            <a:off x="8485632" y="2743200"/>
-            <a:ext cx="3145536" cy="731520"/>
+              <a:rPr lang="en-US" sz="1000" dirty="0">
+                <a:solidFill>
+                  <a:srgbClr val="B7B8C0"/>
+                </a:solidFill>
+                <a:latin typeface="Malgun Gothic" pitchFamily="34" charset="0"/>
+                <a:ea typeface="Malgun Gothic" pitchFamily="34" charset="-122"/>
+                <a:cs typeface="Malgun Gothic" pitchFamily="34" charset="-120"/>
+              </a:rPr>
+              <a:t>가족 4인 + 자문위원 통합</a:t>
+            </a:r>
+            <a:endParaRPr lang="en-US" sz="1000" dirty="0"/>
+          </a:p>
+        </p:txBody>
+      </p:sp>
+      <p:sp>
+        <p:nvSpPr>
+          <p:cNvPr id="37" name="Text 35"/>
+          <p:cNvSpPr/>
+          <p:nvPr/>
+        </p:nvSpPr>
+        <p:spPr>
+          <a:xfrm>
+            <a:off x="9290304" y="2697480"/>
+            <a:ext cx="2377440" cy="640080"/>
           </a:xfrm>
           <a:prstGeom prst="rect">
             <a:avLst/>
@@ -16034,7 +16238,7 @@
               <a:buNone/>
             </a:pPr>
             <a:r>
-              <a:rPr lang="en-US" sz="3600" b="1" dirty="0">
+              <a:rPr lang="en-US" sz="2600" b="1" dirty="0">
                 <a:solidFill>
                   <a:srgbClr val="ECECEF"/>
                 </a:solidFill>
@@ -16042,13 +16246,13 @@
                 <a:ea typeface="Noto Serif KR" pitchFamily="34" charset="-122"/>
                 <a:cs typeface="Noto Serif KR" pitchFamily="34" charset="-120"/>
               </a:rPr>
-              <a:t>1,800,000</a:t>
+              <a:t>590,000</a:t>
             </a:r>
             <a:pPr indent="0" marL="0">
               <a:buNone/>
             </a:pPr>
             <a:r>
-              <a:rPr lang="en-US" sz="1300" dirty="0">
+              <a:rPr lang="en-US" sz="1100" dirty="0">
                 <a:solidFill>
                   <a:srgbClr val="B7B8C0"/>
                 </a:solidFill>
@@ -16056,22 +16260,22 @@
                 <a:ea typeface="Noto Serif KR" pitchFamily="34" charset="-122"/>
                 <a:cs typeface="Noto Serif KR" pitchFamily="34" charset="-120"/>
               </a:rPr>
-              <a:t>  원/년</a:t>
-            </a:r>
-            <a:endParaRPr lang="en-US" sz="3600" dirty="0"/>
-          </a:p>
-        </p:txBody>
-      </p:sp>
-      <p:sp>
-        <p:nvSpPr>
-          <p:cNvPr id="29" name="Text 27"/>
-          <p:cNvSpPr/>
-          <p:nvPr/>
-        </p:nvSpPr>
-        <p:spPr>
-          <a:xfrm>
-            <a:off x="8485632" y="3474720"/>
-            <a:ext cx="3145536" cy="274320"/>
+              <a:t>원/년</a:t>
+            </a:r>
+            <a:endParaRPr lang="en-US" sz="2600" dirty="0"/>
+          </a:p>
+        </p:txBody>
+      </p:sp>
+      <p:sp>
+        <p:nvSpPr>
+          <p:cNvPr id="38" name="Text 36"/>
+          <p:cNvSpPr/>
+          <p:nvPr/>
+        </p:nvSpPr>
+        <p:spPr>
+          <a:xfrm>
+            <a:off x="9290304" y="3383280"/>
+            <a:ext cx="2377440" cy="274320"/>
           </a:xfrm>
           <a:prstGeom prst="rect">
             <a:avLst/>
@@ -16087,7 +16291,7 @@
               <a:buNone/>
             </a:pPr>
             <a:r>
-              <a:rPr lang="en-US" sz="1100" dirty="0">
+              <a:rPr lang="en-US" sz="1000" dirty="0">
                 <a:solidFill>
                   <a:srgbClr val="80828D"/>
                 </a:solidFill>
@@ -16095,22 +16299,22 @@
                 <a:ea typeface="Malgun Gothic" pitchFamily="34" charset="-122"/>
                 <a:cs typeface="Malgun Gothic" pitchFamily="34" charset="-120"/>
               </a:rPr>
-              <a:t>월 환산 150,000원</a:t>
-            </a:r>
-            <a:endParaRPr lang="en-US" sz="1100" dirty="0"/>
-          </a:p>
-        </p:txBody>
-      </p:sp>
-      <p:sp>
-        <p:nvSpPr>
-          <p:cNvPr id="30" name="Shape 28"/>
-          <p:cNvSpPr/>
-          <p:nvPr/>
-        </p:nvSpPr>
-        <p:spPr>
-          <a:xfrm>
-            <a:off x="8485632" y="3886200"/>
-            <a:ext cx="3145536" cy="0"/>
+              <a:t>월 환산 49,166원</a:t>
+            </a:r>
+            <a:endParaRPr lang="en-US" sz="1000" dirty="0"/>
+          </a:p>
+        </p:txBody>
+      </p:sp>
+      <p:sp>
+        <p:nvSpPr>
+          <p:cNvPr id="39" name="Shape 37"/>
+          <p:cNvSpPr/>
+          <p:nvPr/>
+        </p:nvSpPr>
+        <p:spPr>
+          <a:xfrm>
+            <a:off x="9290304" y="3794760"/>
+            <a:ext cx="2377440" cy="0"/>
           </a:xfrm>
           <a:prstGeom prst="line">
             <a:avLst/>
@@ -16126,14 +16330,14 @@
       </p:sp>
       <p:sp>
         <p:nvSpPr>
-          <p:cNvPr id="31" name="Text 29"/>
-          <p:cNvSpPr/>
-          <p:nvPr/>
-        </p:nvSpPr>
-        <p:spPr>
-          <a:xfrm>
-            <a:off x="8485632" y="4023360"/>
-            <a:ext cx="3145536" cy="1920240"/>
+          <p:cNvPr id="40" name="Text 38"/>
+          <p:cNvSpPr/>
+          <p:nvPr/>
+        </p:nvSpPr>
+        <p:spPr>
+          <a:xfrm>
+            <a:off x="9290304" y="3931920"/>
+            <a:ext cx="2377440" cy="1828800"/>
           </a:xfrm>
           <a:prstGeom prst="rect">
             <a:avLst/>
@@ -16153,7 +16357,7 @@
               <a:buChar char="●"/>
             </a:pPr>
             <a:r>
-              <a:rPr lang="en-US" sz="1200" dirty="0">
+              <a:rPr lang="en-US" sz="1100" dirty="0">
                 <a:solidFill>
                   <a:srgbClr val="ECECEF"/>
                 </a:solidFill>
@@ -16161,9 +16365,9 @@
                 <a:ea typeface="Malgun Gothic" pitchFamily="34" charset="-122"/>
                 <a:cs typeface="Malgun Gothic" pitchFamily="34" charset="-120"/>
               </a:rPr>
-              <a:t>프리미엄 전체 포함</a:t>
-            </a:r>
-            <a:endParaRPr lang="en-US" sz="1200" dirty="0"/>
+              <a:t>가족 4인 AI 분석</a:t>
+            </a:r>
+            <a:endParaRPr lang="en-US" sz="1100" dirty="0"/>
           </a:p>
           <a:p>
             <a:pPr marL="342900" indent="-342900">
@@ -16174,7 +16378,7 @@
               <a:buChar char="●"/>
             </a:pPr>
             <a:r>
-              <a:rPr lang="en-US" sz="1200" dirty="0">
+              <a:rPr lang="en-US" sz="1100" dirty="0">
                 <a:solidFill>
                   <a:srgbClr val="ECECEF"/>
                 </a:solidFill>
@@ -16182,9 +16386,9 @@
                 <a:ea typeface="Malgun Gothic" pitchFamily="34" charset="-122"/>
                 <a:cs typeface="Malgun Gothic" pitchFamily="34" charset="-120"/>
               </a:rPr>
-              <a:t>자문위원 분기 1:1 (연 4회)</a:t>
-            </a:r>
-            <a:endParaRPr lang="en-US" sz="1200" dirty="0"/>
+              <a:t>자문위원 통합 2회 (가족 무관)</a:t>
+            </a:r>
+            <a:endParaRPr lang="en-US" sz="1100" dirty="0"/>
           </a:p>
           <a:p>
             <a:pPr marL="342900" indent="-342900">
@@ -16195,7 +16399,7 @@
               <a:buChar char="●"/>
             </a:pPr>
             <a:r>
-              <a:rPr lang="en-US" sz="1200" dirty="0">
+              <a:rPr lang="en-US" sz="1100" dirty="0">
                 <a:solidFill>
                   <a:srgbClr val="ECECEF"/>
                 </a:solidFill>
@@ -16203,49 +16407,28 @@
                 <a:ea typeface="Malgun Gothic" pitchFamily="34" charset="-122"/>
                 <a:cs typeface="Malgun Gothic" pitchFamily="34" charset="-120"/>
               </a:rPr>
-              <a:t>가족 3인 + 가족 합 분석</a:t>
-            </a:r>
-            <a:endParaRPr lang="en-US" sz="1200" dirty="0"/>
-          </a:p>
-          <a:p>
-            <a:pPr marL="342900" indent="-342900">
-              <a:spcAft>
-                <a:spcPts val="600"/>
-              </a:spcAft>
-              <a:buSzPct val="100000"/>
-              <a:buChar char="●"/>
-            </a:pPr>
-            <a:r>
-              <a:rPr lang="en-US" sz="1200" dirty="0">
-                <a:solidFill>
-                  <a:srgbClr val="ECECEF"/>
-                </a:solidFill>
-                <a:latin typeface="Malgun Gothic" pitchFamily="34" charset="0"/>
-                <a:ea typeface="Malgun Gothic" pitchFamily="34" charset="-122"/>
-                <a:cs typeface="Malgun Gothic" pitchFamily="34" charset="-120"/>
-              </a:rPr>
               <a:t>택일 컨설팅 무제한</a:t>
             </a:r>
-            <a:endParaRPr lang="en-US" sz="1200" dirty="0"/>
-          </a:p>
-        </p:txBody>
-      </p:sp>
-      <p:sp>
-        <p:nvSpPr>
-          <p:cNvPr id="32" name="Shape 30"/>
-          <p:cNvSpPr/>
-          <p:nvPr/>
-        </p:nvSpPr>
-        <p:spPr>
-          <a:xfrm>
-            <a:off x="8485632" y="5897880"/>
-            <a:ext cx="3145536" cy="411480"/>
+            <a:endParaRPr lang="en-US" sz="1100" dirty="0"/>
+          </a:p>
+        </p:txBody>
+      </p:sp>
+      <p:sp>
+        <p:nvSpPr>
+          <p:cNvPr id="41" name="Shape 39"/>
+          <p:cNvSpPr/>
+          <p:nvPr/>
+        </p:nvSpPr>
+        <p:spPr>
+          <a:xfrm>
+            <a:off x="9290304" y="5897880"/>
+            <a:ext cx="2377440" cy="411480"/>
           </a:xfrm>
           <a:prstGeom prst="rect">
             <a:avLst/>
           </a:prstGeom>
           <a:solidFill>
-            <a:srgbClr val="1B1E27"/>
+            <a:srgbClr val="0E0F13"/>
           </a:solidFill>
           <a:ln w="12700">
             <a:solidFill>
@@ -16257,14 +16440,14 @@
       </p:sp>
       <p:sp>
         <p:nvSpPr>
-          <p:cNvPr id="33" name="Text 31"/>
-          <p:cNvSpPr/>
-          <p:nvPr/>
-        </p:nvSpPr>
-        <p:spPr>
-          <a:xfrm>
-            <a:off x="8485632" y="5897880"/>
-            <a:ext cx="3145536" cy="411480"/>
+          <p:cNvPr id="42" name="Text 40"/>
+          <p:cNvSpPr/>
+          <p:nvPr/>
+        </p:nvSpPr>
+        <p:spPr>
+          <a:xfrm>
+            <a:off x="9290304" y="5897880"/>
+            <a:ext cx="2377440" cy="411480"/>
           </a:xfrm>
           <a:prstGeom prst="rect">
             <a:avLst/>
@@ -16280,7 +16463,7 @@
               <a:buNone/>
             </a:pPr>
             <a:r>
-              <a:rPr lang="en-US" sz="1200" b="1" dirty="0">
+              <a:rPr lang="en-US" sz="1000" b="1" dirty="0">
                 <a:solidFill>
                   <a:srgbClr val="C9A961"/>
                 </a:solidFill>
@@ -16288,9 +16471,9 @@
                 <a:ea typeface="Noto Serif KR" pitchFamily="34" charset="-122"/>
                 <a:cs typeface="Noto Serif KR" pitchFamily="34" charset="-120"/>
               </a:rPr>
-              <a:t>TM 수수료 (30%): 540,000원</a:t>
-            </a:r>
-            <a:endParaRPr lang="en-US" sz="1200" dirty="0"/>
+              <a:t>TM 수수료 (40%): 236,000원</a:t>
+            </a:r>
+            <a:endParaRPr lang="en-US" sz="1000" dirty="0"/>
           </a:p>
         </p:txBody>
       </p:sp>
@@ -16390,7 +16573,7 @@
               <a:buNone/>
             </a:pPr>
             <a:r>
-              <a:rPr lang="en-US" sz="2800" b="1" dirty="0">
+              <a:rPr lang="en-US" sz="2600" b="1" dirty="0">
                 <a:solidFill>
                   <a:srgbClr val="ECECEF"/>
                 </a:solidFill>
@@ -16398,9 +16581,9 @@
                 <a:ea typeface="Noto Serif KR" pitchFamily="34" charset="-122"/>
                 <a:cs typeface="Noto Serif KR" pitchFamily="34" charset="-120"/>
               </a:rPr>
-              <a:t>왜 39만~180만 원이어도 합리적인가</a:t>
-            </a:r>
-            <a:endParaRPr lang="en-US" sz="2800" dirty="0"/>
+              <a:t>왜 39만~59만 원이어도 합리적인가</a:t>
+            </a:r>
+            <a:endParaRPr lang="en-US" sz="2600" dirty="0"/>
           </a:p>
         </p:txBody>
       </p:sp>
@@ -16457,7 +16640,7 @@
                 <a:ea typeface="Malgun Gothic" pitchFamily="34" charset="-122"/>
                 <a:cs typeface="Malgun Gothic" pitchFamily="34" charset="-120"/>
               </a:rPr>
-              <a:t>CONFIDENTIAL · PARTNERSHIP</a:t>
+              <a:t>CONFIDENTIAL · PARTNERSHIP · v2</a:t>
             </a:r>
             <a:endParaRPr lang="en-US" sz="900" dirty="0"/>
           </a:p>
@@ -16627,7 +16810,7 @@
                 <a:ea typeface="Noto Serif KR" pitchFamily="34" charset="-122"/>
                 <a:cs typeface="Noto Serif KR" pitchFamily="34" charset="-120"/>
               </a:rPr>
-              <a:t>10~15만 원</a:t>
+              <a:t>7~15만 원</a:t>
             </a:r>
             <a:endParaRPr lang="en-US" sz="5200" dirty="0"/>
           </a:p>
@@ -16832,7 +17015,7 @@
                 <a:ea typeface="Noto Serif KR" pitchFamily="34" charset="-122"/>
                 <a:cs typeface="Noto Serif KR" pitchFamily="34" charset="-120"/>
               </a:rPr>
-              <a:t>자평  ·  연간 표준 패키지</a:t>
+              <a:t>자평 Premium (TM 전용)</a:t>
             </a:r>
             <a:endParaRPr lang="en-US" sz="1300" dirty="0"/>
           </a:p>
@@ -16913,7 +17096,7 @@
                 <a:ea typeface="Malgun Gothic" pitchFamily="34" charset="-122"/>
                 <a:cs typeface="Malgun Gothic" pitchFamily="34" charset="-120"/>
               </a:rPr>
-              <a:t>· 1년 365일 무제한</a:t>
+              <a:t>· 1년 365일 무제한 (공정 사용)</a:t>
             </a:r>
             <a:endParaRPr lang="en-US" sz="1300" dirty="0"/>
           </a:p>
@@ -16933,7 +17116,7 @@
                 <a:ea typeface="Malgun Gothic" pitchFamily="34" charset="-122"/>
                 <a:cs typeface="Malgun Gothic" pitchFamily="34" charset="-120"/>
               </a:rPr>
-              <a:t>· 분기 종합 리포트 4건</a:t>
+              <a:t>· 분기 종합 PDF 리포트 4건</a:t>
             </a:r>
             <a:endParaRPr lang="en-US" sz="1300" dirty="0"/>
           </a:p>
@@ -16973,7 +17156,7 @@
                 <a:ea typeface="Malgun Gothic" pitchFamily="34" charset="-122"/>
                 <a:cs typeface="Malgun Gothic" pitchFamily="34" charset="-120"/>
               </a:rPr>
-              <a:t>· (프리미엄+) 자문위원 1:1</a:t>
+              <a:t>· 자문위원 1:1 전화 연 2회</a:t>
             </a:r>
             <a:endParaRPr lang="en-US" sz="1300" dirty="0"/>
           </a:p>
@@ -17037,7 +17220,7 @@
                 <a:ea typeface="Noto Serif KR" pitchFamily="34" charset="-122"/>
                 <a:cs typeface="Noto Serif KR" pitchFamily="34" charset="-120"/>
               </a:rPr>
-              <a:t>명리원 1회 비용 × 3~5회  =  자평 표준 1년  ·  콜에서 그대로 사용 가능한 정당화 한 줄</a:t>
+              <a:t>명리원 1회 비용 × 3~5회  =  자평 Premium 1년  +  자문위원 1:1 두 번</a:t>
             </a:r>
             <a:endParaRPr lang="en-US" sz="1300" dirty="0"/>
           </a:p>
@@ -17139,7 +17322,7 @@
               <a:buNone/>
             </a:pPr>
             <a:r>
-              <a:rPr lang="en-US" sz="2800" b="1" dirty="0">
+              <a:rPr lang="en-US" sz="2600" b="1" dirty="0">
                 <a:solidFill>
                   <a:srgbClr val="ECECEF"/>
                 </a:solidFill>
@@ -17147,9 +17330,9 @@
                 <a:ea typeface="Noto Serif KR" pitchFamily="34" charset="-122"/>
                 <a:cs typeface="Noto Serif KR" pitchFamily="34" charset="-120"/>
               </a:rPr>
-              <a:t>협의 출발점 — 모두 첫 미팅에서 조정 가능</a:t>
-            </a:r>
-            <a:endParaRPr lang="en-US" sz="2800" dirty="0"/>
+              <a:t>협의 출발점 — 첫 미팅에서 조정 가능</a:t>
+            </a:r>
+            <a:endParaRPr lang="en-US" sz="2600" dirty="0"/>
           </a:p>
         </p:txBody>
       </p:sp>
@@ -17206,7 +17389,7 @@
                 <a:ea typeface="Malgun Gothic" pitchFamily="34" charset="-122"/>
                 <a:cs typeface="Malgun Gothic" pitchFamily="34" charset="-120"/>
               </a:rPr>
-              <a:t>CONFIDENTIAL · PARTNERSHIP</a:t>
+              <a:t>CONFIDENTIAL · PARTNERSHIP · v2</a:t>
             </a:r>
             <a:endParaRPr lang="en-US" sz="900" dirty="0"/>
           </a:p>
@@ -17333,7 +17516,7 @@
         <p:spPr>
           <a:xfrm>
             <a:off x="777240" y="1947672"/>
-            <a:ext cx="1828800" cy="320040"/>
+            <a:ext cx="2286000" cy="320040"/>
           </a:xfrm>
           <a:prstGeom prst="rect">
             <a:avLst/>
@@ -17357,7 +17540,7 @@
                 <a:ea typeface="Noto Serif KR" pitchFamily="34" charset="-122"/>
                 <a:cs typeface="Noto Serif KR" pitchFamily="34" charset="-120"/>
               </a:rPr>
-              <a:t>수수료</a:t>
+              <a:t>Premium 수수료</a:t>
             </a:r>
             <a:endParaRPr lang="en-US" sz="1100" dirty="0"/>
           </a:p>
@@ -17388,7 +17571,7 @@
               <a:buNone/>
             </a:pPr>
             <a:r>
-              <a:rPr lang="en-US" sz="1600" b="1" dirty="0">
+              <a:rPr lang="en-US" sz="1500" b="1" dirty="0">
                 <a:solidFill>
                   <a:srgbClr val="ECECEF"/>
                 </a:solidFill>
@@ -17396,9 +17579,9 @@
                 <a:ea typeface="Noto Serif KR" pitchFamily="34" charset="-122"/>
                 <a:cs typeface="Noto Serif KR" pitchFamily="34" charset="-120"/>
               </a:rPr>
-              <a:t>계약가의 20~30%</a:t>
-            </a:r>
-            <a:endParaRPr lang="en-US" sz="1600" dirty="0"/>
+              <a:t>35%  ·  136,500원/건</a:t>
+            </a:r>
+            <a:endParaRPr lang="en-US" sz="1500" dirty="0"/>
           </a:p>
         </p:txBody>
       </p:sp>
@@ -17435,7 +17618,7 @@
                 <a:ea typeface="Malgun Gothic" pitchFamily="34" charset="-122"/>
                 <a:cs typeface="Malgun Gothic" pitchFamily="34" charset="-120"/>
               </a:rPr>
-              <a:t>티어·볼륨 차등, 첫 미팅 협의</a:t>
+              <a:t>협의 범위 30~40%</a:t>
             </a:r>
             <a:endParaRPr lang="en-US" sz="1100" dirty="0"/>
           </a:p>
@@ -17495,7 +17678,7 @@
         <p:spPr>
           <a:xfrm>
             <a:off x="6400800" y="1947672"/>
-            <a:ext cx="1828800" cy="320040"/>
+            <a:ext cx="2286000" cy="320040"/>
           </a:xfrm>
           <a:prstGeom prst="rect">
             <a:avLst/>
@@ -17519,7 +17702,7 @@
                 <a:ea typeface="Noto Serif KR" pitchFamily="34" charset="-122"/>
                 <a:cs typeface="Noto Serif KR" pitchFamily="34" charset="-120"/>
               </a:rPr>
-              <a:t>정산</a:t>
+              <a:t>Family 수수료</a:t>
             </a:r>
             <a:endParaRPr lang="en-US" sz="1100" dirty="0"/>
           </a:p>
@@ -17550,7 +17733,7 @@
               <a:buNone/>
             </a:pPr>
             <a:r>
-              <a:rPr lang="en-US" sz="1600" b="1" dirty="0">
+              <a:rPr lang="en-US" sz="1500" b="1" dirty="0">
                 <a:solidFill>
                   <a:srgbClr val="ECECEF"/>
                 </a:solidFill>
@@ -17558,9 +17741,9 @@
                 <a:ea typeface="Noto Serif KR" pitchFamily="34" charset="-122"/>
                 <a:cs typeface="Noto Serif KR" pitchFamily="34" charset="-120"/>
               </a:rPr>
-              <a:t>월 2회 (15일·말일)</a:t>
-            </a:r>
-            <a:endParaRPr lang="en-US" sz="1600" dirty="0"/>
+              <a:t>40%  ·  236,000원/건</a:t>
+            </a:r>
+            <a:endParaRPr lang="en-US" sz="1500" dirty="0"/>
           </a:p>
         </p:txBody>
       </p:sp>
@@ -17597,7 +17780,7 @@
                 <a:ea typeface="Malgun Gothic" pitchFamily="34" charset="-122"/>
                 <a:cs typeface="Malgun Gothic" pitchFamily="34" charset="-120"/>
               </a:rPr>
-              <a:t>청약철회 발생분은 수수료 회수</a:t>
+              <a:t>협의 범위 35~45%</a:t>
             </a:r>
             <a:endParaRPr lang="en-US" sz="1100" dirty="0"/>
           </a:p>
@@ -17657,7 +17840,7 @@
         <p:spPr>
           <a:xfrm>
             <a:off x="777240" y="3456432"/>
-            <a:ext cx="1828800" cy="320040"/>
+            <a:ext cx="2286000" cy="320040"/>
           </a:xfrm>
           <a:prstGeom prst="rect">
             <a:avLst/>
@@ -17681,7 +17864,7 @@
                 <a:ea typeface="Noto Serif KR" pitchFamily="34" charset="-122"/>
                 <a:cs typeface="Noto Serif KR" pitchFamily="34" charset="-120"/>
               </a:rPr>
-              <a:t>계약 형태</a:t>
+              <a:t>갱신 수수료</a:t>
             </a:r>
             <a:endParaRPr lang="en-US" sz="1100" dirty="0"/>
           </a:p>
@@ -17712,7 +17895,7 @@
               <a:buNone/>
             </a:pPr>
             <a:r>
-              <a:rPr lang="en-US" sz="1600" b="1" dirty="0">
+              <a:rPr lang="en-US" sz="1500" b="1" dirty="0">
                 <a:solidFill>
                   <a:srgbClr val="ECECEF"/>
                 </a:solidFill>
@@ -17720,9 +17903,9 @@
                 <a:ea typeface="Noto Serif KR" pitchFamily="34" charset="-122"/>
                 <a:cs typeface="Noto Serif KR" pitchFamily="34" charset="-120"/>
               </a:rPr>
-              <a:t>위탁판매 추천</a:t>
-            </a:r>
-            <a:endParaRPr lang="en-US" sz="1600" dirty="0"/>
+              <a:t>1년차 갱신 10%</a:t>
+            </a:r>
+            <a:endParaRPr lang="en-US" sz="1500" dirty="0"/>
           </a:p>
         </p:txBody>
       </p:sp>
@@ -17759,7 +17942,7 @@
                 <a:ea typeface="Malgun Gothic" pitchFamily="34" charset="-122"/>
                 <a:cs typeface="Malgun Gothic" pitchFamily="34" charset="-120"/>
               </a:rPr>
-              <a:t>자평 명의 결제, TM 수수료 정산. 총판 협의 가능</a:t>
+              <a:t>LTV 보상 — 단순 신규 가입 외 추가</a:t>
             </a:r>
             <a:endParaRPr lang="en-US" sz="1100" dirty="0"/>
           </a:p>
@@ -17819,7 +18002,7 @@
         <p:spPr>
           <a:xfrm>
             <a:off x="6400800" y="3456432"/>
-            <a:ext cx="1828800" cy="320040"/>
+            <a:ext cx="2286000" cy="320040"/>
           </a:xfrm>
           <a:prstGeom prst="rect">
             <a:avLst/>
@@ -17843,7 +18026,7 @@
                 <a:ea typeface="Noto Serif KR" pitchFamily="34" charset="-122"/>
                 <a:cs typeface="Noto Serif KR" pitchFamily="34" charset="-120"/>
               </a:rPr>
-              <a:t>독점</a:t>
+              <a:t>볼륨 보너스</a:t>
             </a:r>
             <a:endParaRPr lang="en-US" sz="1100" dirty="0"/>
           </a:p>
@@ -17874,7 +18057,7 @@
               <a:buNone/>
             </a:pPr>
             <a:r>
-              <a:rPr lang="en-US" sz="1600" b="1" dirty="0">
+              <a:rPr lang="en-US" sz="1500" b="1" dirty="0">
                 <a:solidFill>
                   <a:srgbClr val="ECECEF"/>
                 </a:solidFill>
@@ -17882,9 +18065,9 @@
                 <a:ea typeface="Noto Serif KR" pitchFamily="34" charset="-122"/>
                 <a:cs typeface="Noto Serif KR" pitchFamily="34" charset="-120"/>
               </a:rPr>
-              <a:t>지역·세그먼트 단위 협의</a:t>
-            </a:r>
-            <a:endParaRPr lang="en-US" sz="1600" dirty="0"/>
+              <a:t>월 50건 +5% / 100건 +10%</a:t>
+            </a:r>
+            <a:endParaRPr lang="en-US" sz="1500" dirty="0"/>
           </a:p>
         </p:txBody>
       </p:sp>
@@ -17921,7 +18104,7 @@
                 <a:ea typeface="Malgun Gothic" pitchFamily="34" charset="-122"/>
                 <a:cs typeface="Malgun Gothic" pitchFamily="34" charset="-120"/>
               </a:rPr>
-              <a:t>예: 수도권 50대 여성. 전국 독점은 KPI 보장 조건부</a:t>
+              <a:t>회사 규모별 인센티브</a:t>
             </a:r>
             <a:endParaRPr lang="en-US" sz="1100" dirty="0"/>
           </a:p>
@@ -17981,7 +18164,7 @@
         <p:spPr>
           <a:xfrm>
             <a:off x="777240" y="4965192"/>
-            <a:ext cx="1828800" cy="320040"/>
+            <a:ext cx="2286000" cy="320040"/>
           </a:xfrm>
           <a:prstGeom prst="rect">
             <a:avLst/>
@@ -18005,7 +18188,7 @@
                 <a:ea typeface="Noto Serif KR" pitchFamily="34" charset="-122"/>
                 <a:cs typeface="Noto Serif KR" pitchFamily="34" charset="-120"/>
               </a:rPr>
-              <a:t>최저 가입 인센티브</a:t>
+              <a:t>청약철회 회수</a:t>
             </a:r>
             <a:endParaRPr lang="en-US" sz="1100" dirty="0"/>
           </a:p>
@@ -18036,7 +18219,7 @@
               <a:buNone/>
             </a:pPr>
             <a:r>
-              <a:rPr lang="en-US" sz="1600" b="1" dirty="0">
+              <a:rPr lang="en-US" sz="1500" b="1" dirty="0">
                 <a:solidFill>
                   <a:srgbClr val="ECECEF"/>
                 </a:solidFill>
@@ -18044,9 +18227,9 @@
                 <a:ea typeface="Noto Serif KR" pitchFamily="34" charset="-122"/>
                 <a:cs typeface="Noto Serif KR" pitchFamily="34" charset="-120"/>
               </a:rPr>
-              <a:t>파일럿 첫 30일 CPA 5% 보전</a:t>
-            </a:r>
-            <a:endParaRPr lang="en-US" sz="1600" dirty="0"/>
+              <a:t>7일 100% / ~30일 50% / ~90일 25%</a:t>
+            </a:r>
+            <a:endParaRPr lang="en-US" sz="1500" dirty="0"/>
           </a:p>
         </p:txBody>
       </p:sp>
@@ -18083,7 +18266,7 @@
                 <a:ea typeface="Malgun Gothic" pitchFamily="34" charset="-122"/>
                 <a:cs typeface="Malgun Gothic" pitchFamily="34" charset="-120"/>
               </a:rPr>
-              <a:t>첫 100건 가입 시 추가 보전 — TM 리스크 헷지</a:t>
+              <a:t>단계별 회수 — 90일 이후 0%</a:t>
             </a:r>
             <a:endParaRPr lang="en-US" sz="1100" dirty="0"/>
           </a:p>
@@ -18143,7 +18326,7 @@
         <p:spPr>
           <a:xfrm>
             <a:off x="6400800" y="4965192"/>
-            <a:ext cx="1828800" cy="320040"/>
+            <a:ext cx="2286000" cy="320040"/>
           </a:xfrm>
           <a:prstGeom prst="rect">
             <a:avLst/>
@@ -18167,7 +18350,7 @@
                 <a:ea typeface="Noto Serif KR" pitchFamily="34" charset="-122"/>
                 <a:cs typeface="Noto Serif KR" pitchFamily="34" charset="-120"/>
               </a:rPr>
-              <a:t>교육</a:t>
+              <a:t>파일럿 보전</a:t>
             </a:r>
             <a:endParaRPr lang="en-US" sz="1100" dirty="0"/>
           </a:p>
@@ -18198,7 +18381,7 @@
               <a:buNone/>
             </a:pPr>
             <a:r>
-              <a:rPr lang="en-US" sz="1600" b="1" dirty="0">
+              <a:rPr lang="en-US" sz="1500" b="1" dirty="0">
                 <a:solidFill>
                   <a:srgbClr val="ECECEF"/>
                 </a:solidFill>
@@ -18206,9 +18389,9 @@
                 <a:ea typeface="Noto Serif KR" pitchFamily="34" charset="-122"/>
                 <a:cs typeface="Noto Serif KR" pitchFamily="34" charset="-120"/>
               </a:rPr>
-              <a:t>입문 4시간 + 심화 6시간</a:t>
-            </a:r>
-            <a:endParaRPr lang="en-US" sz="1600" dirty="0"/>
+              <a:t>첫 30일 CPA 5% 추가</a:t>
+            </a:r>
+            <a:endParaRPr lang="en-US" sz="1500" dirty="0"/>
           </a:p>
         </p:txBody>
       </p:sp>
@@ -18245,7 +18428,7 @@
                 <a:ea typeface="Malgun Gothic" pitchFamily="34" charset="-122"/>
                 <a:cs typeface="Malgun Gothic" pitchFamily="34" charset="-120"/>
               </a:rPr>
-              <a:t>자평 무상 제공 (명리 기초 + 상품 + 컴플라이언스)</a:t>
+              <a:t>100건 미달 시 자평이 보전</a:t>
             </a:r>
             <a:endParaRPr lang="en-US" sz="1100" dirty="0"/>
           </a:p>
